--- a/MERIDIAN_DISTRIBUIDORA_LTDA.pptx
+++ b/MERIDIAN_DISTRIBUIDORA_LTDA.pptx
@@ -11,7 +11,6 @@
     <p:sldId id="259" r:id="rId10"/>
     <p:sldId id="260" r:id="rId11"/>
     <p:sldId id="261" r:id="rId12"/>
-    <p:sldId id="262" r:id="rId13"/>
   </p:sldIdLst>
   <p:sldSz cx="12188952" cy="6858000" type="screen4x3"/>
   <p:notesSz cx="6858000" cy="9144000"/>
@@ -143,13 +142,10 @@
           </c:spPr>
           <c:cat>
             <c:strRef>
-              <c:f>Sheet1!$A$2:$A$3</c:f>
+              <c:f>Sheet1!$A$2:$A$2</c:f>
               <c:strCache>
-                <c:ptCount val="2"/>
+                <c:ptCount val="1"/>
                 <c:pt idx="0">
-                  <c:v>Abril 2026</c:v>
-                </c:pt>
-                <c:pt idx="1">
                   <c:v>Maio 2026</c:v>
                 </c:pt>
               </c:strCache>
@@ -157,15 +153,12 @@
           </c:cat>
           <c:val>
             <c:numRef>
-              <c:f>Sheet1!$B$2:$B$3</c:f>
+              <c:f>Sheet1!$B$2:$B$2</c:f>
               <c:numCache>
                 <c:formatCode>General</c:formatCode>
-                <c:ptCount val="2"/>
+                <c:ptCount val="1"/>
                 <c:pt idx="0">
-                  <c:v>11</c:v>
-                </c:pt>
-                <c:pt idx="1">
-                  <c:v>2</c:v>
+                  <c:v>18</c:v>
                 </c:pt>
               </c:numCache>
             </c:numRef>
@@ -192,13 +185,10 @@
           </c:spPr>
           <c:cat>
             <c:strRef>
-              <c:f>Sheet1!$A$2:$A$3</c:f>
+              <c:f>Sheet1!$A$2:$A$2</c:f>
               <c:strCache>
-                <c:ptCount val="2"/>
+                <c:ptCount val="1"/>
                 <c:pt idx="0">
-                  <c:v>Abril 2026</c:v>
-                </c:pt>
-                <c:pt idx="1">
                   <c:v>Maio 2026</c:v>
                 </c:pt>
               </c:strCache>
@@ -206,15 +196,12 @@
           </c:cat>
           <c:val>
             <c:numRef>
-              <c:f>Sheet1!$C$2:$C$3</c:f>
+              <c:f>Sheet1!$C$2:$C$2</c:f>
               <c:numCache>
                 <c:formatCode>General</c:formatCode>
-                <c:ptCount val="2"/>
+                <c:ptCount val="1"/>
                 <c:pt idx="0">
                   <c:v>0</c:v>
-                </c:pt>
-                <c:pt idx="1">
-                  <c:v>1</c:v>
                 </c:pt>
               </c:numCache>
             </c:numRef>
@@ -3494,14 +3481,13 @@
           <a:p>
             <a:pPr algn="ctr"/>
             <a:r>
-              <a:rPr sz="1600" b="1">
+              <a:rPr sz="1400" b="1">
                 <a:solidFill>
                   <a:srgbClr val="FFFFFF"/>
                 </a:solidFill>
                 <a:latin typeface="Calibri"/>
               </a:rPr>
-              <a:t>Nossa rota e ir alem das
-entregas!</a:t>
+              <a:t>Nossa rota e ir alem das entregas!</a:t>
             </a:r>
           </a:p>
         </p:txBody>
@@ -3688,7 +3674,7 @@
         <p:spPr>
           <a:xfrm>
             <a:off x="1005840" y="2240279"/>
-            <a:ext cx="2377439" cy="891540"/>
+            <a:ext cx="2377440" cy="868680"/>
           </a:xfrm>
           <a:prstGeom prst="rect">
             <a:avLst/>
@@ -3709,7 +3695,7 @@
                 </a:solidFill>
                 <a:latin typeface="Calibri"/>
               </a:rPr>
-              <a:t>3</a:t>
+              <a:t>18</a:t>
             </a:r>
           </a:p>
         </p:txBody>
@@ -3722,8 +3708,8 @@
         </p:nvSpPr>
         <p:spPr>
           <a:xfrm>
-            <a:off x="1005840" y="3058668"/>
-            <a:ext cx="2377439" cy="548640"/>
+            <a:off x="1005840" y="3090672"/>
+            <a:ext cx="2377440" cy="411480"/>
           </a:xfrm>
           <a:prstGeom prst="rect">
             <a:avLst/>
@@ -3803,7 +3789,7 @@
         <p:spPr>
           <a:xfrm>
             <a:off x="3931920" y="2240279"/>
-            <a:ext cx="2377439" cy="891540"/>
+            <a:ext cx="2377440" cy="868680"/>
           </a:xfrm>
           <a:prstGeom prst="rect">
             <a:avLst/>
@@ -3824,7 +3810,7 @@
                 </a:solidFill>
                 <a:latin typeface="Calibri"/>
               </a:rPr>
-              <a:t>2</a:t>
+              <a:t>18</a:t>
             </a:r>
           </a:p>
         </p:txBody>
@@ -3837,8 +3823,8 @@
         </p:nvSpPr>
         <p:spPr>
           <a:xfrm>
-            <a:off x="3931920" y="3058668"/>
-            <a:ext cx="2377439" cy="548640"/>
+            <a:off x="3931920" y="3090672"/>
+            <a:ext cx="2377440" cy="411480"/>
           </a:xfrm>
           <a:prstGeom prst="rect">
             <a:avLst/>
@@ -3918,7 +3904,7 @@
         <p:spPr>
           <a:xfrm>
             <a:off x="6858000" y="2240279"/>
-            <a:ext cx="2377439" cy="891540"/>
+            <a:ext cx="2377440" cy="868680"/>
           </a:xfrm>
           <a:prstGeom prst="rect">
             <a:avLst/>
@@ -3935,11 +3921,11 @@
             <a:r>
               <a:rPr sz="2800" b="1">
                 <a:solidFill>
-                  <a:srgbClr val="EF4444"/>
+                  <a:srgbClr val="10B981"/>
                 </a:solidFill>
                 <a:latin typeface="Calibri"/>
               </a:rPr>
-              <a:t>1</a:t>
+              <a:t>0</a:t>
             </a:r>
           </a:p>
         </p:txBody>
@@ -3952,8 +3938,8 @@
         </p:nvSpPr>
         <p:spPr>
           <a:xfrm>
-            <a:off x="6858000" y="3058668"/>
-            <a:ext cx="2377439" cy="548640"/>
+            <a:off x="6858000" y="3090672"/>
+            <a:ext cx="2377440" cy="411480"/>
           </a:xfrm>
           <a:prstGeom prst="rect">
             <a:avLst/>
@@ -4033,7 +4019,7 @@
         <p:spPr>
           <a:xfrm>
             <a:off x="9784080" y="2240279"/>
-            <a:ext cx="2377439" cy="891540"/>
+            <a:ext cx="2377440" cy="868680"/>
           </a:xfrm>
           <a:prstGeom prst="rect">
             <a:avLst/>
@@ -4050,11 +4036,11 @@
             <a:r>
               <a:rPr sz="2800" b="1">
                 <a:solidFill>
-                  <a:srgbClr val="EF4444"/>
+                  <a:srgbClr val="10B981"/>
                 </a:solidFill>
                 <a:latin typeface="Calibri"/>
               </a:rPr>
-              <a:t>66.7%</a:t>
+              <a:t>100.0%</a:t>
             </a:r>
           </a:p>
         </p:txBody>
@@ -4067,8 +4053,8 @@
         </p:nvSpPr>
         <p:spPr>
           <a:xfrm>
-            <a:off x="9784080" y="3058668"/>
-            <a:ext cx="2377439" cy="548640"/>
+            <a:off x="9784080" y="3090672"/>
+            <a:ext cx="2377440" cy="411480"/>
           </a:xfrm>
           <a:prstGeom prst="rect">
             <a:avLst/>
@@ -4121,7 +4107,7 @@
               <a:tr h="475488">
                 <a:tc>
                   <a:txBody>
-                    <a:bodyPr wrap="square"/>
+                    <a:bodyPr/>
                     <a:lstStyle/>
                     <a:p>
                       <a:pPr algn="ctr"/>
@@ -4144,7 +4130,7 @@
                 </a:tc>
                 <a:tc>
                   <a:txBody>
-                    <a:bodyPr wrap="square"/>
+                    <a:bodyPr/>
                     <a:lstStyle/>
                     <a:p>
                       <a:pPr algn="ctr"/>
@@ -4167,7 +4153,7 @@
                 </a:tc>
                 <a:tc>
                   <a:txBody>
-                    <a:bodyPr wrap="square"/>
+                    <a:bodyPr/>
                     <a:lstStyle/>
                     <a:p>
                       <a:pPr algn="ctr"/>
@@ -4190,7 +4176,7 @@
                 </a:tc>
                 <a:tc>
                   <a:txBody>
-                    <a:bodyPr wrap="square"/>
+                    <a:bodyPr/>
                     <a:lstStyle/>
                     <a:p>
                       <a:pPr algn="ctr"/>
@@ -4215,18 +4201,18 @@
               <a:tr h="475488">
                 <a:tc>
                   <a:txBody>
-                    <a:bodyPr wrap="square"/>
-                    <a:lstStyle/>
-                    <a:p>
-                      <a:pPr algn="l"/>
-                      <a:r>
-                        <a:rPr sz="1000" b="0">
-                          <a:solidFill>
-                            <a:srgbClr val="1D1B43"/>
-                          </a:solidFill>
-                          <a:latin typeface="Calibri"/>
-                        </a:rPr>
-                        <a:t>Total Entregas</a:t>
+                    <a:bodyPr/>
+                    <a:lstStyle/>
+                    <a:p>
+                      <a:pPr algn="l"/>
+                      <a:r>
+                        <a:rPr sz="1000" b="0">
+                          <a:solidFill>
+                            <a:srgbClr val="1D1B43"/>
+                          </a:solidFill>
+                          <a:latin typeface="Calibri"/>
+                        </a:rPr>
+                        <a:t>Total</a:t>
                       </a:r>
                     </a:p>
                   </a:txBody>
@@ -4238,18 +4224,18 @@
                 </a:tc>
                 <a:tc>
                   <a:txBody>
-                    <a:bodyPr wrap="square"/>
-                    <a:lstStyle/>
-                    <a:p>
-                      <a:pPr algn="l"/>
-                      <a:r>
-                        <a:rPr sz="1000" b="0">
-                          <a:solidFill>
-                            <a:srgbClr val="1D1B43"/>
-                          </a:solidFill>
-                          <a:latin typeface="Calibri"/>
-                        </a:rPr>
-                        <a:t>11</a:t>
+                    <a:bodyPr/>
+                    <a:lstStyle/>
+                    <a:p>
+                      <a:pPr algn="l"/>
+                      <a:r>
+                        <a:rPr sz="1000" b="0">
+                          <a:solidFill>
+                            <a:srgbClr val="1D1B43"/>
+                          </a:solidFill>
+                          <a:latin typeface="Calibri"/>
+                        </a:rPr>
+                        <a:t>-</a:t>
                       </a:r>
                     </a:p>
                   </a:txBody>
@@ -4261,18 +4247,18 @@
                 </a:tc>
                 <a:tc>
                   <a:txBody>
-                    <a:bodyPr wrap="square"/>
-                    <a:lstStyle/>
-                    <a:p>
-                      <a:pPr algn="l"/>
-                      <a:r>
-                        <a:rPr sz="1000" b="0">
-                          <a:solidFill>
-                            <a:srgbClr val="1D1B43"/>
-                          </a:solidFill>
-                          <a:latin typeface="Calibri"/>
-                        </a:rPr>
-                        <a:t>3</a:t>
+                    <a:bodyPr/>
+                    <a:lstStyle/>
+                    <a:p>
+                      <a:pPr algn="l"/>
+                      <a:r>
+                        <a:rPr sz="1000" b="0">
+                          <a:solidFill>
+                            <a:srgbClr val="1D1B43"/>
+                          </a:solidFill>
+                          <a:latin typeface="Calibri"/>
+                        </a:rPr>
+                        <a:t>18</a:t>
                       </a:r>
                     </a:p>
                   </a:txBody>
@@ -4284,18 +4270,18 @@
                 </a:tc>
                 <a:tc>
                   <a:txBody>
-                    <a:bodyPr wrap="square"/>
-                    <a:lstStyle/>
-                    <a:p>
-                      <a:pPr algn="l"/>
-                      <a:r>
-                        <a:rPr sz="1000" b="0">
-                          <a:solidFill>
-                            <a:srgbClr val="1D1B43"/>
-                          </a:solidFill>
-                          <a:latin typeface="Calibri"/>
-                        </a:rPr>
-                        <a:t>- 8</a:t>
+                    <a:bodyPr/>
+                    <a:lstStyle/>
+                    <a:p>
+                      <a:pPr algn="l"/>
+                      <a:r>
+                        <a:rPr sz="1000" b="0">
+                          <a:solidFill>
+                            <a:srgbClr val="1D1B43"/>
+                          </a:solidFill>
+                          <a:latin typeface="Calibri"/>
+                        </a:rPr>
+                        <a:t>-</a:t>
                       </a:r>
                     </a:p>
                   </a:txBody>
@@ -4309,7 +4295,7 @@
               <a:tr h="475488">
                 <a:tc>
                   <a:txBody>
-                    <a:bodyPr wrap="square"/>
+                    <a:bodyPr/>
                     <a:lstStyle/>
                     <a:p>
                       <a:pPr algn="l"/>
@@ -4332,18 +4318,18 @@
                 </a:tc>
                 <a:tc>
                   <a:txBody>
-                    <a:bodyPr wrap="square"/>
-                    <a:lstStyle/>
-                    <a:p>
-                      <a:pPr algn="l"/>
-                      <a:r>
-                        <a:rPr sz="1000" b="0">
-                          <a:solidFill>
-                            <a:srgbClr val="1D1B43"/>
-                          </a:solidFill>
-                          <a:latin typeface="Calibri"/>
-                        </a:rPr>
-                        <a:t>11</a:t>
+                    <a:bodyPr/>
+                    <a:lstStyle/>
+                    <a:p>
+                      <a:pPr algn="l"/>
+                      <a:r>
+                        <a:rPr sz="1000" b="0">
+                          <a:solidFill>
+                            <a:srgbClr val="1D1B43"/>
+                          </a:solidFill>
+                          <a:latin typeface="Calibri"/>
+                        </a:rPr>
+                        <a:t>-</a:t>
                       </a:r>
                     </a:p>
                   </a:txBody>
@@ -4355,18 +4341,18 @@
                 </a:tc>
                 <a:tc>
                   <a:txBody>
-                    <a:bodyPr wrap="square"/>
-                    <a:lstStyle/>
-                    <a:p>
-                      <a:pPr algn="l"/>
-                      <a:r>
-                        <a:rPr sz="1000" b="0">
-                          <a:solidFill>
-                            <a:srgbClr val="1D1B43"/>
-                          </a:solidFill>
-                          <a:latin typeface="Calibri"/>
-                        </a:rPr>
-                        <a:t>2</a:t>
+                    <a:bodyPr/>
+                    <a:lstStyle/>
+                    <a:p>
+                      <a:pPr algn="l"/>
+                      <a:r>
+                        <a:rPr sz="1000" b="0">
+                          <a:solidFill>
+                            <a:srgbClr val="1D1B43"/>
+                          </a:solidFill>
+                          <a:latin typeface="Calibri"/>
+                        </a:rPr>
+                        <a:t>18</a:t>
                       </a:r>
                     </a:p>
                   </a:txBody>
@@ -4378,18 +4364,18 @@
                 </a:tc>
                 <a:tc>
                   <a:txBody>
-                    <a:bodyPr wrap="square"/>
-                    <a:lstStyle/>
-                    <a:p>
-                      <a:pPr algn="l"/>
-                      <a:r>
-                        <a:rPr sz="1000" b="0">
-                          <a:solidFill>
-                            <a:srgbClr val="1D1B43"/>
-                          </a:solidFill>
-                          <a:latin typeface="Calibri"/>
-                        </a:rPr>
-                        <a:t>- 9</a:t>
+                    <a:bodyPr/>
+                    <a:lstStyle/>
+                    <a:p>
+                      <a:pPr algn="l"/>
+                      <a:r>
+                        <a:rPr sz="1000" b="0">
+                          <a:solidFill>
+                            <a:srgbClr val="1D1B43"/>
+                          </a:solidFill>
+                          <a:latin typeface="Calibri"/>
+                        </a:rPr>
+                        <a:t>-</a:t>
                       </a:r>
                     </a:p>
                   </a:txBody>
@@ -4403,18 +4389,18 @@
               <a:tr h="475488">
                 <a:tc>
                   <a:txBody>
-                    <a:bodyPr wrap="square"/>
-                    <a:lstStyle/>
-                    <a:p>
-                      <a:pPr algn="l"/>
-                      <a:r>
-                        <a:rPr sz="1000" b="0">
-                          <a:solidFill>
-                            <a:srgbClr val="1D1B43"/>
-                          </a:solidFill>
-                          <a:latin typeface="Calibri"/>
-                        </a:rPr>
-                        <a:t>Fora do Prazo</a:t>
+                    <a:bodyPr/>
+                    <a:lstStyle/>
+                    <a:p>
+                      <a:pPr algn="l"/>
+                      <a:r>
+                        <a:rPr sz="1000" b="0">
+                          <a:solidFill>
+                            <a:srgbClr val="1D1B43"/>
+                          </a:solidFill>
+                          <a:latin typeface="Calibri"/>
+                        </a:rPr>
+                        <a:t>Fora Prazo</a:t>
                       </a:r>
                     </a:p>
                   </a:txBody>
@@ -4426,7 +4412,30 @@
                 </a:tc>
                 <a:tc>
                   <a:txBody>
-                    <a:bodyPr wrap="square"/>
+                    <a:bodyPr/>
+                    <a:lstStyle/>
+                    <a:p>
+                      <a:pPr algn="l"/>
+                      <a:r>
+                        <a:rPr sz="1000" b="0">
+                          <a:solidFill>
+                            <a:srgbClr val="1D1B43"/>
+                          </a:solidFill>
+                          <a:latin typeface="Calibri"/>
+                        </a:rPr>
+                        <a:t>-</a:t>
+                      </a:r>
+                    </a:p>
+                  </a:txBody>
+                  <a:tcPr>
+                    <a:solidFill>
+                      <a:srgbClr val="FFFFFF"/>
+                    </a:solidFill>
+                  </a:tcPr>
+                </a:tc>
+                <a:tc>
+                  <a:txBody>
+                    <a:bodyPr/>
                     <a:lstStyle/>
                     <a:p>
                       <a:pPr algn="l"/>
@@ -4449,41 +4458,18 @@
                 </a:tc>
                 <a:tc>
                   <a:txBody>
-                    <a:bodyPr wrap="square"/>
-                    <a:lstStyle/>
-                    <a:p>
-                      <a:pPr algn="l"/>
-                      <a:r>
-                        <a:rPr sz="1000" b="0">
-                          <a:solidFill>
-                            <a:srgbClr val="1D1B43"/>
-                          </a:solidFill>
-                          <a:latin typeface="Calibri"/>
-                        </a:rPr>
-                        <a:t>1</a:t>
-                      </a:r>
-                    </a:p>
-                  </a:txBody>
-                  <a:tcPr>
-                    <a:solidFill>
-                      <a:srgbClr val="FFFFFF"/>
-                    </a:solidFill>
-                  </a:tcPr>
-                </a:tc>
-                <a:tc>
-                  <a:txBody>
-                    <a:bodyPr wrap="square"/>
-                    <a:lstStyle/>
-                    <a:p>
-                      <a:pPr algn="l"/>
-                      <a:r>
-                        <a:rPr sz="1000" b="0">
-                          <a:solidFill>
-                            <a:srgbClr val="1D1B43"/>
-                          </a:solidFill>
-                          <a:latin typeface="Calibri"/>
-                        </a:rPr>
-                        <a:t>+ 1</a:t>
+                    <a:bodyPr/>
+                    <a:lstStyle/>
+                    <a:p>
+                      <a:pPr algn="l"/>
+                      <a:r>
+                        <a:rPr sz="1000" b="0">
+                          <a:solidFill>
+                            <a:srgbClr val="1D1B43"/>
+                          </a:solidFill>
+                          <a:latin typeface="Calibri"/>
+                        </a:rPr>
+                        <a:t>-</a:t>
                       </a:r>
                     </a:p>
                   </a:txBody>
@@ -4497,7 +4483,7 @@
               <a:tr h="475488">
                 <a:tc>
                   <a:txBody>
-                    <a:bodyPr wrap="square"/>
+                    <a:bodyPr/>
                     <a:lstStyle/>
                     <a:p>
                       <a:pPr algn="l"/>
@@ -4520,7 +4506,7 @@
                 </a:tc>
                 <a:tc>
                   <a:txBody>
-                    <a:bodyPr wrap="square"/>
+                    <a:bodyPr/>
                     <a:lstStyle/>
                     <a:p>
                       <a:pPr algn="l"/>
@@ -4543,18 +4529,18 @@
                 </a:tc>
                 <a:tc>
                   <a:txBody>
-                    <a:bodyPr wrap="square"/>
-                    <a:lstStyle/>
-                    <a:p>
-                      <a:pPr algn="l"/>
-                      <a:r>
-                        <a:rPr sz="1000" b="0">
-                          <a:solidFill>
-                            <a:srgbClr val="1D1B43"/>
-                          </a:solidFill>
-                          <a:latin typeface="Calibri"/>
-                        </a:rPr>
-                        <a:t>66.7%</a:t>
+                    <a:bodyPr/>
+                    <a:lstStyle/>
+                    <a:p>
+                      <a:pPr algn="l"/>
+                      <a:r>
+                        <a:rPr sz="1000" b="0">
+                          <a:solidFill>
+                            <a:srgbClr val="1D1B43"/>
+                          </a:solidFill>
+                          <a:latin typeface="Calibri"/>
+                        </a:rPr>
+                        <a:t>100.0%</a:t>
                       </a:r>
                     </a:p>
                   </a:txBody>
@@ -4566,18 +4552,18 @@
                 </a:tc>
                 <a:tc>
                   <a:txBody>
-                    <a:bodyPr wrap="square"/>
-                    <a:lstStyle/>
-                    <a:p>
-                      <a:pPr algn="l"/>
-                      <a:r>
-                        <a:rPr sz="1000" b="0">
-                          <a:solidFill>
-                            <a:srgbClr val="1D1B43"/>
-                          </a:solidFill>
-                          <a:latin typeface="Calibri"/>
-                        </a:rPr>
-                        <a:t>- 33.3pp</a:t>
+                    <a:bodyPr/>
+                    <a:lstStyle/>
+                    <a:p>
+                      <a:pPr algn="l"/>
+                      <a:r>
+                        <a:rPr sz="1000" b="0">
+                          <a:solidFill>
+                            <a:srgbClr val="1D1B43"/>
+                          </a:solidFill>
+                          <a:latin typeface="Calibri"/>
+                        </a:rPr>
+                        <a:t>+ 0.0pp</a:t>
                       </a:r>
                     </a:p>
                   </a:txBody>
@@ -4748,7 +4734,7 @@
         </p:nvGraphicFramePr>
         <p:xfrm>
           <a:off x="7955279" y="2286000"/>
-          <a:ext cx="4480560" cy="1316736"/>
+          <a:ext cx="4480560" cy="877824"/>
         </p:xfrm>
         <a:graphic>
           <a:graphicData uri="http://schemas.openxmlformats.org/drawingml/2006/table">
@@ -4766,7 +4752,7 @@
               <a:tr h="438912">
                 <a:tc>
                   <a:txBody>
-                    <a:bodyPr wrap="square"/>
+                    <a:bodyPr/>
                     <a:lstStyle/>
                     <a:p>
                       <a:pPr algn="ctr"/>
@@ -4789,7 +4775,7 @@
                 </a:tc>
                 <a:tc>
                   <a:txBody>
-                    <a:bodyPr wrap="square"/>
+                    <a:bodyPr/>
                     <a:lstStyle/>
                     <a:p>
                       <a:pPr algn="ctr"/>
@@ -4812,7 +4798,7 @@
                 </a:tc>
                 <a:tc>
                   <a:txBody>
-                    <a:bodyPr wrap="square"/>
+                    <a:bodyPr/>
                     <a:lstStyle/>
                     <a:p>
                       <a:pPr algn="ctr"/>
@@ -4835,7 +4821,7 @@
                 </a:tc>
                 <a:tc>
                   <a:txBody>
-                    <a:bodyPr wrap="square"/>
+                    <a:bodyPr/>
                     <a:lstStyle/>
                     <a:p>
                       <a:pPr algn="ctr"/>
@@ -4858,7 +4844,7 @@
                 </a:tc>
                 <a:tc>
                   <a:txBody>
-                    <a:bodyPr wrap="square"/>
+                    <a:bodyPr/>
                     <a:lstStyle/>
                     <a:p>
                       <a:pPr algn="ctr"/>
@@ -4883,18 +4869,18 @@
               <a:tr h="438912">
                 <a:tc>
                   <a:txBody>
-                    <a:bodyPr wrap="square"/>
-                    <a:lstStyle/>
-                    <a:p>
-                      <a:pPr algn="l"/>
-                      <a:r>
-                        <a:rPr sz="1000" b="0">
-                          <a:solidFill>
-                            <a:srgbClr val="1D1B43"/>
-                          </a:solidFill>
-                          <a:latin typeface="Calibri"/>
-                        </a:rPr>
-                        <a:t>Abril 2026</a:t>
+                    <a:bodyPr/>
+                    <a:lstStyle/>
+                    <a:p>
+                      <a:pPr algn="l"/>
+                      <a:r>
+                        <a:rPr sz="1000" b="0">
+                          <a:solidFill>
+                            <a:srgbClr val="1D1B43"/>
+                          </a:solidFill>
+                          <a:latin typeface="Calibri"/>
+                        </a:rPr>
+                        <a:t>Maio 2026</a:t>
                       </a:r>
                     </a:p>
                   </a:txBody>
@@ -4906,18 +4892,18 @@
                 </a:tc>
                 <a:tc>
                   <a:txBody>
-                    <a:bodyPr wrap="square"/>
-                    <a:lstStyle/>
-                    <a:p>
-                      <a:pPr algn="l"/>
-                      <a:r>
-                        <a:rPr sz="1000" b="0">
-                          <a:solidFill>
-                            <a:srgbClr val="1D1B43"/>
-                          </a:solidFill>
-                          <a:latin typeface="Calibri"/>
-                        </a:rPr>
-                        <a:t>11</a:t>
+                    <a:bodyPr/>
+                    <a:lstStyle/>
+                    <a:p>
+                      <a:pPr algn="l"/>
+                      <a:r>
+                        <a:rPr sz="1000" b="0">
+                          <a:solidFill>
+                            <a:srgbClr val="1D1B43"/>
+                          </a:solidFill>
+                          <a:latin typeface="Calibri"/>
+                        </a:rPr>
+                        <a:t>18</a:t>
                       </a:r>
                     </a:p>
                   </a:txBody>
@@ -4929,18 +4915,18 @@
                 </a:tc>
                 <a:tc>
                   <a:txBody>
-                    <a:bodyPr wrap="square"/>
-                    <a:lstStyle/>
-                    <a:p>
-                      <a:pPr algn="l"/>
-                      <a:r>
-                        <a:rPr sz="1000" b="0">
-                          <a:solidFill>
-                            <a:srgbClr val="1D1B43"/>
-                          </a:solidFill>
-                          <a:latin typeface="Calibri"/>
-                        </a:rPr>
-                        <a:t>11</a:t>
+                    <a:bodyPr/>
+                    <a:lstStyle/>
+                    <a:p>
+                      <a:pPr algn="l"/>
+                      <a:r>
+                        <a:rPr sz="1000" b="0">
+                          <a:solidFill>
+                            <a:srgbClr val="1D1B43"/>
+                          </a:solidFill>
+                          <a:latin typeface="Calibri"/>
+                        </a:rPr>
+                        <a:t>18</a:t>
                       </a:r>
                     </a:p>
                   </a:txBody>
@@ -4952,7 +4938,7 @@
                 </a:tc>
                 <a:tc>
                   <a:txBody>
-                    <a:bodyPr wrap="square"/>
+                    <a:bodyPr/>
                     <a:lstStyle/>
                     <a:p>
                       <a:pPr algn="l"/>
@@ -4975,7 +4961,7 @@
                 </a:tc>
                 <a:tc>
                   <a:txBody>
-                    <a:bodyPr wrap="square"/>
+                    <a:bodyPr/>
                     <a:lstStyle/>
                     <a:p>
                       <a:pPr algn="l"/>
@@ -4993,123 +4979,6 @@
                   <a:tcPr>
                     <a:solidFill>
                       <a:srgbClr val="FFFFFF"/>
-                    </a:solidFill>
-                  </a:tcPr>
-                </a:tc>
-              </a:tr>
-              <a:tr h="438912">
-                <a:tc>
-                  <a:txBody>
-                    <a:bodyPr wrap="square"/>
-                    <a:lstStyle/>
-                    <a:p>
-                      <a:pPr algn="l"/>
-                      <a:r>
-                        <a:rPr sz="1000" b="0">
-                          <a:solidFill>
-                            <a:srgbClr val="1D1B43"/>
-                          </a:solidFill>
-                          <a:latin typeface="Calibri"/>
-                        </a:rPr>
-                        <a:t>Maio 2026</a:t>
-                      </a:r>
-                    </a:p>
-                  </a:txBody>
-                  <a:tcPr>
-                    <a:solidFill>
-                      <a:srgbClr val="F2F2F2"/>
-                    </a:solidFill>
-                  </a:tcPr>
-                </a:tc>
-                <a:tc>
-                  <a:txBody>
-                    <a:bodyPr wrap="square"/>
-                    <a:lstStyle/>
-                    <a:p>
-                      <a:pPr algn="l"/>
-                      <a:r>
-                        <a:rPr sz="1000" b="0">
-                          <a:solidFill>
-                            <a:srgbClr val="1D1B43"/>
-                          </a:solidFill>
-                          <a:latin typeface="Calibri"/>
-                        </a:rPr>
-                        <a:t>3</a:t>
-                      </a:r>
-                    </a:p>
-                  </a:txBody>
-                  <a:tcPr>
-                    <a:solidFill>
-                      <a:srgbClr val="F2F2F2"/>
-                    </a:solidFill>
-                  </a:tcPr>
-                </a:tc>
-                <a:tc>
-                  <a:txBody>
-                    <a:bodyPr wrap="square"/>
-                    <a:lstStyle/>
-                    <a:p>
-                      <a:pPr algn="l"/>
-                      <a:r>
-                        <a:rPr sz="1000" b="0">
-                          <a:solidFill>
-                            <a:srgbClr val="1D1B43"/>
-                          </a:solidFill>
-                          <a:latin typeface="Calibri"/>
-                        </a:rPr>
-                        <a:t>2</a:t>
-                      </a:r>
-                    </a:p>
-                  </a:txBody>
-                  <a:tcPr>
-                    <a:solidFill>
-                      <a:srgbClr val="F2F2F2"/>
-                    </a:solidFill>
-                  </a:tcPr>
-                </a:tc>
-                <a:tc>
-                  <a:txBody>
-                    <a:bodyPr wrap="square"/>
-                    <a:lstStyle/>
-                    <a:p>
-                      <a:pPr algn="l"/>
-                      <a:r>
-                        <a:rPr sz="1000" b="0">
-                          <a:solidFill>
-                            <a:srgbClr val="1D1B43"/>
-                          </a:solidFill>
-                          <a:latin typeface="Calibri"/>
-                        </a:rPr>
-                        <a:t>1</a:t>
-                      </a:r>
-                    </a:p>
-                  </a:txBody>
-                  <a:tcPr>
-                    <a:solidFill>
-                      <a:srgbClr val="F2F2F2"/>
-                    </a:solidFill>
-                  </a:tcPr>
-                </a:tc>
-                <a:tc>
-                  <a:txBody>
-                    <a:bodyPr wrap="square"/>
-                    <a:lstStyle/>
-                    <a:p>
-                      <a:pPr algn="l"/>
-                      <a:r>
-                        <a:rPr sz="1000" b="0">
-                          <a:solidFill>
-                            <a:srgbClr val="1D1B43"/>
-                          </a:solidFill>
-                          <a:latin typeface="Calibri"/>
-                        </a:rPr>
-                        <a:t>66.7%</a:t>
-                      </a:r>
-                    </a:p>
-                  </a:txBody>
-                  <a:tcPr>
-                    <a:solidFill>
-                      <a:srgbClr val="F2F2F2"/>
                     </a:solidFill>
                   </a:tcPr>
                 </a:tc>
@@ -5191,7 +5060,7 @@
                 </a:solidFill>
                 <a:latin typeface="Calibri"/>
               </a:rPr>
-              <a:t>PERFORMANCE: 66.7% - ATENCAO</a:t>
+              <a:t>PERFORMANCE: 100.0% - EXCELENTE</a:t>
             </a:r>
           </a:p>
         </p:txBody>
@@ -5255,7 +5124,7 @@
         <p:spPr>
           <a:xfrm>
             <a:off x="749808" y="502920"/>
-            <a:ext cx="10058400" cy="914400"/>
+            <a:ext cx="9144000" cy="914400"/>
           </a:xfrm>
           <a:prstGeom prst="rect">
             <a:avLst/>
@@ -5270,13 +5139,13 @@
           <a:p>
             <a:pPr algn="l"/>
             <a:r>
-              <a:rPr sz="3200" b="1">
+              <a:rPr sz="4000" b="1">
                 <a:solidFill>
                   <a:srgbClr val="F97316"/>
                 </a:solidFill>
                 <a:latin typeface="Calibri"/>
               </a:rPr>
-              <a:t>OCORRENCIAS FORA DO PRAZO (1)</a:t>
+              <a:t>PERFORMANCE POR UF</a:t>
             </a:r>
           </a:p>
         </p:txBody>
@@ -5289,7 +5158,7 @@
         </p:nvSpPr>
         <p:spPr>
           <a:xfrm>
-            <a:off x="749808" y="1600200"/>
+            <a:off x="749808" y="1719072"/>
             <a:ext cx="10424160" cy="36576"/>
           </a:xfrm>
           <a:prstGeom prst="rect">
@@ -5333,8 +5202,8 @@
           <p:nvPr/>
         </p:nvGraphicFramePr>
         <p:xfrm>
-          <a:off x="457200" y="1828800"/>
-          <a:ext cx="11429999" cy="768096"/>
+          <a:off x="731520" y="1920240"/>
+          <a:ext cx="10698480" cy="914400"/>
         </p:xfrm>
         <a:graphic>
           <a:graphicData uri="http://schemas.openxmlformats.org/drawingml/2006/table">
@@ -5343,16 +5212,17 @@
                 <a:tableStyleId>{5C22544A-7EE6-4342-B048-85BDC9FD1C3A}</a:tableStyleId>
               </a:tblPr>
               <a:tblGrid>
-                <a:gridCol w="1280160"/>
-                <a:gridCol w="3749039"/>
-                <a:gridCol w="2103120"/>
+                <a:gridCol w="1097280"/>
+                <a:gridCol w="1645920"/>
+                <a:gridCol w="1645920"/>
+                <a:gridCol w="1645920"/>
                 <a:gridCol w="1554480"/>
-                <a:gridCol w="2743200"/>
+                <a:gridCol w="3108960"/>
               </a:tblGrid>
-              <a:tr h="384048">
-                <a:tc>
-                  <a:txBody>
-                    <a:bodyPr wrap="square"/>
+              <a:tr h="457200">
+                <a:tc>
+                  <a:txBody>
+                    <a:bodyPr/>
                     <a:lstStyle/>
                     <a:p>
                       <a:pPr algn="ctr"/>
@@ -5363,7 +5233,7 @@
                           </a:solidFill>
                           <a:latin typeface="Calibri"/>
                         </a:rPr>
-                        <a:t>MD</a:t>
+                        <a:t>UF</a:t>
                       </a:r>
                     </a:p>
                   </a:txBody>
@@ -5375,7 +5245,7 @@
                 </a:tc>
                 <a:tc>
                   <a:txBody>
-                    <a:bodyPr wrap="square"/>
+                    <a:bodyPr/>
                     <a:lstStyle/>
                     <a:p>
                       <a:pPr algn="ctr"/>
@@ -5386,7 +5256,7 @@
                           </a:solidFill>
                           <a:latin typeface="Calibri"/>
                         </a:rPr>
-                        <a:t>DESTINATARIO</a:t>
+                        <a:t>TOTAL</a:t>
                       </a:r>
                     </a:p>
                   </a:txBody>
@@ -5398,7 +5268,7 @@
                 </a:tc>
                 <a:tc>
                   <a:txBody>
-                    <a:bodyPr wrap="square"/>
+                    <a:bodyPr/>
                     <a:lstStyle/>
                     <a:p>
                       <a:pPr algn="ctr"/>
@@ -5409,7 +5279,7 @@
                           </a:solidFill>
                           <a:latin typeface="Calibri"/>
                         </a:rPr>
-                        <a:t>CIDADE/UF</a:t>
+                        <a:t>NO PRAZO</a:t>
                       </a:r>
                     </a:p>
                   </a:txBody>
@@ -5421,7 +5291,7 @@
                 </a:tc>
                 <a:tc>
                   <a:txBody>
-                    <a:bodyPr wrap="square"/>
+                    <a:bodyPr/>
                     <a:lstStyle/>
                     <a:p>
                       <a:pPr algn="ctr"/>
@@ -5432,7 +5302,7 @@
                           </a:solidFill>
                           <a:latin typeface="Calibri"/>
                         </a:rPr>
-                        <a:t>PREV. ENTREGA</a:t>
+                        <a:t>FORA</a:t>
                       </a:r>
                     </a:p>
                   </a:txBody>
@@ -5444,7 +5314,7 @@
                 </a:tc>
                 <a:tc>
                   <a:txBody>
-                    <a:bodyPr wrap="square"/>
+                    <a:bodyPr/>
                     <a:lstStyle/>
                     <a:p>
                       <a:pPr algn="ctr"/>
@@ -5455,6 +5325,29 @@
                           </a:solidFill>
                           <a:latin typeface="Calibri"/>
                         </a:rPr>
+                        <a:t>TAXA</a:t>
+                      </a:r>
+                    </a:p>
+                  </a:txBody>
+                  <a:tcPr>
+                    <a:solidFill>
+                      <a:srgbClr val="1D1B43"/>
+                    </a:solidFill>
+                  </a:tcPr>
+                </a:tc>
+                <a:tc>
+                  <a:txBody>
+                    <a:bodyPr/>
+                    <a:lstStyle/>
+                    <a:p>
+                      <a:pPr algn="ctr"/>
+                      <a:r>
+                        <a:rPr sz="1100" b="1">
+                          <a:solidFill>
+                            <a:srgbClr val="FFFFFF"/>
+                          </a:solidFill>
+                          <a:latin typeface="Calibri"/>
+                        </a:rPr>
                         <a:t>STATUS</a:t>
                       </a:r>
                     </a:p>
@@ -5466,21 +5359,21 @@
                   </a:tcPr>
                 </a:tc>
               </a:tr>
-              <a:tr h="384048">
-                <a:tc>
-                  <a:txBody>
-                    <a:bodyPr wrap="square"/>
-                    <a:lstStyle/>
-                    <a:p>
-                      <a:pPr algn="l"/>
-                      <a:r>
-                        <a:rPr sz="1000" b="0">
-                          <a:solidFill>
-                            <a:srgbClr val="1D1B43"/>
-                          </a:solidFill>
-                          <a:latin typeface="Calibri"/>
-                        </a:rPr>
-                        <a:t>281192</a:t>
+              <a:tr h="457200">
+                <a:tc>
+                  <a:txBody>
+                    <a:bodyPr/>
+                    <a:lstStyle/>
+                    <a:p>
+                      <a:pPr algn="l"/>
+                      <a:r>
+                        <a:rPr sz="1000" b="0">
+                          <a:solidFill>
+                            <a:srgbClr val="1D1B43"/>
+                          </a:solidFill>
+                          <a:latin typeface="Calibri"/>
+                        </a:rPr>
+                        <a:t>SP</a:t>
                       </a:r>
                     </a:p>
                   </a:txBody>
@@ -5492,18 +5385,18 @@
                 </a:tc>
                 <a:tc>
                   <a:txBody>
-                    <a:bodyPr wrap="square"/>
-                    <a:lstStyle/>
-                    <a:p>
-                      <a:pPr algn="l"/>
-                      <a:r>
-                        <a:rPr sz="1000" b="0">
-                          <a:solidFill>
-                            <a:srgbClr val="1D1B43"/>
-                          </a:solidFill>
-                          <a:latin typeface="Calibri"/>
-                        </a:rPr>
-                        <a:t>CASA SAO BENTO LANCH - GUARULHOS / SP</a:t>
+                    <a:bodyPr/>
+                    <a:lstStyle/>
+                    <a:p>
+                      <a:pPr algn="l"/>
+                      <a:r>
+                        <a:rPr sz="1000" b="0">
+                          <a:solidFill>
+                            <a:srgbClr val="1D1B43"/>
+                          </a:solidFill>
+                          <a:latin typeface="Calibri"/>
+                        </a:rPr>
+                        <a:t>18</a:t>
                       </a:r>
                     </a:p>
                   </a:txBody>
@@ -5515,18 +5408,18 @@
                 </a:tc>
                 <a:tc>
                   <a:txBody>
-                    <a:bodyPr wrap="square"/>
-                    <a:lstStyle/>
-                    <a:p>
-                      <a:pPr algn="l"/>
-                      <a:r>
-                        <a:rPr sz="1000" b="0">
-                          <a:solidFill>
-                            <a:srgbClr val="1D1B43"/>
-                          </a:solidFill>
-                          <a:latin typeface="Calibri"/>
-                        </a:rPr>
-                        <a:t>GUARULHOS/SP</a:t>
+                    <a:bodyPr/>
+                    <a:lstStyle/>
+                    <a:p>
+                      <a:pPr algn="l"/>
+                      <a:r>
+                        <a:rPr sz="1000" b="0">
+                          <a:solidFill>
+                            <a:srgbClr val="1D1B43"/>
+                          </a:solidFill>
+                          <a:latin typeface="Calibri"/>
+                        </a:rPr>
+                        <a:t>18</a:t>
                       </a:r>
                     </a:p>
                   </a:txBody>
@@ -5538,18 +5431,18 @@
                 </a:tc>
                 <a:tc>
                   <a:txBody>
-                    <a:bodyPr wrap="square"/>
-                    <a:lstStyle/>
-                    <a:p>
-                      <a:pPr algn="l"/>
-                      <a:r>
-                        <a:rPr sz="1000" b="0">
-                          <a:solidFill>
-                            <a:srgbClr val="1D1B43"/>
-                          </a:solidFill>
-                          <a:latin typeface="Calibri"/>
-                        </a:rPr>
-                        <a:t>05/05/2026</a:t>
+                    <a:bodyPr/>
+                    <a:lstStyle/>
+                    <a:p>
+                      <a:pPr algn="l"/>
+                      <a:r>
+                        <a:rPr sz="1000" b="0">
+                          <a:solidFill>
+                            <a:srgbClr val="1D1B43"/>
+                          </a:solidFill>
+                          <a:latin typeface="Calibri"/>
+                        </a:rPr>
+                        <a:t>0</a:t>
                       </a:r>
                     </a:p>
                   </a:txBody>
@@ -5561,18 +5454,41 @@
                 </a:tc>
                 <a:tc>
                   <a:txBody>
-                    <a:bodyPr wrap="square"/>
-                    <a:lstStyle/>
-                    <a:p>
-                      <a:pPr algn="l"/>
-                      <a:r>
-                        <a:rPr sz="1000" b="0">
-                          <a:solidFill>
-                            <a:srgbClr val="1D1B43"/>
-                          </a:solidFill>
-                          <a:latin typeface="Calibri"/>
-                        </a:rPr>
-                        <a:t>FORA DO PRAZO</a:t>
+                    <a:bodyPr/>
+                    <a:lstStyle/>
+                    <a:p>
+                      <a:pPr algn="l"/>
+                      <a:r>
+                        <a:rPr sz="1000" b="0">
+                          <a:solidFill>
+                            <a:srgbClr val="1D1B43"/>
+                          </a:solidFill>
+                          <a:latin typeface="Calibri"/>
+                        </a:rPr>
+                        <a:t>100.0%</a:t>
+                      </a:r>
+                    </a:p>
+                  </a:txBody>
+                  <a:tcPr>
+                    <a:solidFill>
+                      <a:srgbClr val="FFFFFF"/>
+                    </a:solidFill>
+                  </a:tcPr>
+                </a:tc>
+                <a:tc>
+                  <a:txBody>
+                    <a:bodyPr/>
+                    <a:lstStyle/>
+                    <a:p>
+                      <a:pPr algn="l"/>
+                      <a:r>
+                        <a:rPr sz="1000" b="0">
+                          <a:solidFill>
+                            <a:srgbClr val="1D1B43"/>
+                          </a:solidFill>
+                          <a:latin typeface="Calibri"/>
+                        </a:rPr>
+                        <a:t>Excelente</a:t>
                       </a:r>
                     </a:p>
                   </a:txBody>
@@ -5646,444 +5562,6 @@
         <p:spPr>
           <a:xfrm>
             <a:off x="749808" y="502920"/>
-            <a:ext cx="9144000" cy="914400"/>
-          </a:xfrm>
-          <a:prstGeom prst="rect">
-            <a:avLst/>
-          </a:prstGeom>
-          <a:noFill/>
-        </p:spPr>
-        <p:txBody>
-          <a:bodyPr wrap="square">
-            <a:spAutoFit/>
-          </a:bodyPr>
-          <a:lstStyle/>
-          <a:p>
-            <a:pPr algn="l"/>
-            <a:r>
-              <a:rPr sz="4000" b="1">
-                <a:solidFill>
-                  <a:srgbClr val="F97316"/>
-                </a:solidFill>
-                <a:latin typeface="Calibri"/>
-              </a:rPr>
-              <a:t>PERFORMANCE POR UF</a:t>
-            </a:r>
-          </a:p>
-        </p:txBody>
-      </p:sp>
-      <p:sp>
-        <p:nvSpPr>
-          <p:cNvPr id="4" name="Rectangle 3"/>
-          <p:cNvSpPr/>
-          <p:nvPr/>
-        </p:nvSpPr>
-        <p:spPr>
-          <a:xfrm>
-            <a:off x="749808" y="1719072"/>
-            <a:ext cx="10424160" cy="36576"/>
-          </a:xfrm>
-          <a:prstGeom prst="rect">
-            <a:avLst/>
-          </a:prstGeom>
-          <a:solidFill>
-            <a:srgbClr val="F97316"/>
-          </a:solidFill>
-          <a:ln>
-            <a:noFill/>
-          </a:ln>
-        </p:spPr>
-        <p:style>
-          <a:lnRef idx="1">
-            <a:schemeClr val="accent1"/>
-          </a:lnRef>
-          <a:fillRef idx="3">
-            <a:schemeClr val="accent1"/>
-          </a:fillRef>
-          <a:effectRef idx="2">
-            <a:schemeClr val="accent1"/>
-          </a:effectRef>
-          <a:fontRef idx="minor">
-            <a:schemeClr val="lt1"/>
-          </a:fontRef>
-        </p:style>
-        <p:txBody>
-          <a:bodyPr rtlCol="0" anchor="ctr"/>
-          <a:lstStyle/>
-          <a:p>
-            <a:pPr algn="ctr"/>
-          </a:p>
-        </p:txBody>
-      </p:sp>
-      <p:graphicFrame>
-        <p:nvGraphicFramePr>
-          <p:cNvPr id="5" name="Table 4"/>
-          <p:cNvGraphicFramePr>
-            <a:graphicFrameLocks noGrp="1"/>
-          </p:cNvGraphicFramePr>
-          <p:nvPr/>
-        </p:nvGraphicFramePr>
-        <p:xfrm>
-          <a:off x="731520" y="1920240"/>
-          <a:ext cx="10698480" cy="914400"/>
-        </p:xfrm>
-        <a:graphic>
-          <a:graphicData uri="http://schemas.openxmlformats.org/drawingml/2006/table">
-            <a:tbl>
-              <a:tblPr firstRow="1" bandRow="1">
-                <a:tableStyleId>{5C22544A-7EE6-4342-B048-85BDC9FD1C3A}</a:tableStyleId>
-              </a:tblPr>
-              <a:tblGrid>
-                <a:gridCol w="1097280"/>
-                <a:gridCol w="1645920"/>
-                <a:gridCol w="1645920"/>
-                <a:gridCol w="1645920"/>
-                <a:gridCol w="1554480"/>
-                <a:gridCol w="3108960"/>
-              </a:tblGrid>
-              <a:tr h="457200">
-                <a:tc>
-                  <a:txBody>
-                    <a:bodyPr wrap="square"/>
-                    <a:lstStyle/>
-                    <a:p>
-                      <a:pPr algn="ctr"/>
-                      <a:r>
-                        <a:rPr sz="1100" b="1">
-                          <a:solidFill>
-                            <a:srgbClr val="FFFFFF"/>
-                          </a:solidFill>
-                          <a:latin typeface="Calibri"/>
-                        </a:rPr>
-                        <a:t>UF</a:t>
-                      </a:r>
-                    </a:p>
-                  </a:txBody>
-                  <a:tcPr>
-                    <a:solidFill>
-                      <a:srgbClr val="1D1B43"/>
-                    </a:solidFill>
-                  </a:tcPr>
-                </a:tc>
-                <a:tc>
-                  <a:txBody>
-                    <a:bodyPr wrap="square"/>
-                    <a:lstStyle/>
-                    <a:p>
-                      <a:pPr algn="ctr"/>
-                      <a:r>
-                        <a:rPr sz="1100" b="1">
-                          <a:solidFill>
-                            <a:srgbClr val="FFFFFF"/>
-                          </a:solidFill>
-                          <a:latin typeface="Calibri"/>
-                        </a:rPr>
-                        <a:t>TOTAL</a:t>
-                      </a:r>
-                    </a:p>
-                  </a:txBody>
-                  <a:tcPr>
-                    <a:solidFill>
-                      <a:srgbClr val="1D1B43"/>
-                    </a:solidFill>
-                  </a:tcPr>
-                </a:tc>
-                <a:tc>
-                  <a:txBody>
-                    <a:bodyPr wrap="square"/>
-                    <a:lstStyle/>
-                    <a:p>
-                      <a:pPr algn="ctr"/>
-                      <a:r>
-                        <a:rPr sz="1100" b="1">
-                          <a:solidFill>
-                            <a:srgbClr val="FFFFFF"/>
-                          </a:solidFill>
-                          <a:latin typeface="Calibri"/>
-                        </a:rPr>
-                        <a:t>NO PRAZO</a:t>
-                      </a:r>
-                    </a:p>
-                  </a:txBody>
-                  <a:tcPr>
-                    <a:solidFill>
-                      <a:srgbClr val="1D1B43"/>
-                    </a:solidFill>
-                  </a:tcPr>
-                </a:tc>
-                <a:tc>
-                  <a:txBody>
-                    <a:bodyPr wrap="square"/>
-                    <a:lstStyle/>
-                    <a:p>
-                      <a:pPr algn="ctr"/>
-                      <a:r>
-                        <a:rPr sz="1100" b="1">
-                          <a:solidFill>
-                            <a:srgbClr val="FFFFFF"/>
-                          </a:solidFill>
-                          <a:latin typeface="Calibri"/>
-                        </a:rPr>
-                        <a:t>FORA</a:t>
-                      </a:r>
-                    </a:p>
-                  </a:txBody>
-                  <a:tcPr>
-                    <a:solidFill>
-                      <a:srgbClr val="1D1B43"/>
-                    </a:solidFill>
-                  </a:tcPr>
-                </a:tc>
-                <a:tc>
-                  <a:txBody>
-                    <a:bodyPr wrap="square"/>
-                    <a:lstStyle/>
-                    <a:p>
-                      <a:pPr algn="ctr"/>
-                      <a:r>
-                        <a:rPr sz="1100" b="1">
-                          <a:solidFill>
-                            <a:srgbClr val="FFFFFF"/>
-                          </a:solidFill>
-                          <a:latin typeface="Calibri"/>
-                        </a:rPr>
-                        <a:t>TAXA</a:t>
-                      </a:r>
-                    </a:p>
-                  </a:txBody>
-                  <a:tcPr>
-                    <a:solidFill>
-                      <a:srgbClr val="1D1B43"/>
-                    </a:solidFill>
-                  </a:tcPr>
-                </a:tc>
-                <a:tc>
-                  <a:txBody>
-                    <a:bodyPr wrap="square"/>
-                    <a:lstStyle/>
-                    <a:p>
-                      <a:pPr algn="ctr"/>
-                      <a:r>
-                        <a:rPr sz="1100" b="1">
-                          <a:solidFill>
-                            <a:srgbClr val="FFFFFF"/>
-                          </a:solidFill>
-                          <a:latin typeface="Calibri"/>
-                        </a:rPr>
-                        <a:t>STATUS</a:t>
-                      </a:r>
-                    </a:p>
-                  </a:txBody>
-                  <a:tcPr>
-                    <a:solidFill>
-                      <a:srgbClr val="1D1B43"/>
-                    </a:solidFill>
-                  </a:tcPr>
-                </a:tc>
-              </a:tr>
-              <a:tr h="457200">
-                <a:tc>
-                  <a:txBody>
-                    <a:bodyPr wrap="square"/>
-                    <a:lstStyle/>
-                    <a:p>
-                      <a:pPr algn="l"/>
-                      <a:r>
-                        <a:rPr sz="1000" b="0">
-                          <a:solidFill>
-                            <a:srgbClr val="1D1B43"/>
-                          </a:solidFill>
-                          <a:latin typeface="Calibri"/>
-                        </a:rPr>
-                        <a:t>SP</a:t>
-                      </a:r>
-                    </a:p>
-                  </a:txBody>
-                  <a:tcPr>
-                    <a:solidFill>
-                      <a:srgbClr val="FFFFFF"/>
-                    </a:solidFill>
-                  </a:tcPr>
-                </a:tc>
-                <a:tc>
-                  <a:txBody>
-                    <a:bodyPr wrap="square"/>
-                    <a:lstStyle/>
-                    <a:p>
-                      <a:pPr algn="l"/>
-                      <a:r>
-                        <a:rPr sz="1000" b="0">
-                          <a:solidFill>
-                            <a:srgbClr val="1D1B43"/>
-                          </a:solidFill>
-                          <a:latin typeface="Calibri"/>
-                        </a:rPr>
-                        <a:t>3</a:t>
-                      </a:r>
-                    </a:p>
-                  </a:txBody>
-                  <a:tcPr>
-                    <a:solidFill>
-                      <a:srgbClr val="FFFFFF"/>
-                    </a:solidFill>
-                  </a:tcPr>
-                </a:tc>
-                <a:tc>
-                  <a:txBody>
-                    <a:bodyPr wrap="square"/>
-                    <a:lstStyle/>
-                    <a:p>
-                      <a:pPr algn="l"/>
-                      <a:r>
-                        <a:rPr sz="1000" b="0">
-                          <a:solidFill>
-                            <a:srgbClr val="1D1B43"/>
-                          </a:solidFill>
-                          <a:latin typeface="Calibri"/>
-                        </a:rPr>
-                        <a:t>2</a:t>
-                      </a:r>
-                    </a:p>
-                  </a:txBody>
-                  <a:tcPr>
-                    <a:solidFill>
-                      <a:srgbClr val="FFFFFF"/>
-                    </a:solidFill>
-                  </a:tcPr>
-                </a:tc>
-                <a:tc>
-                  <a:txBody>
-                    <a:bodyPr wrap="square"/>
-                    <a:lstStyle/>
-                    <a:p>
-                      <a:pPr algn="l"/>
-                      <a:r>
-                        <a:rPr sz="1000" b="0">
-                          <a:solidFill>
-                            <a:srgbClr val="1D1B43"/>
-                          </a:solidFill>
-                          <a:latin typeface="Calibri"/>
-                        </a:rPr>
-                        <a:t>1</a:t>
-                      </a:r>
-                    </a:p>
-                  </a:txBody>
-                  <a:tcPr>
-                    <a:solidFill>
-                      <a:srgbClr val="FFFFFF"/>
-                    </a:solidFill>
-                  </a:tcPr>
-                </a:tc>
-                <a:tc>
-                  <a:txBody>
-                    <a:bodyPr wrap="square"/>
-                    <a:lstStyle/>
-                    <a:p>
-                      <a:pPr algn="l"/>
-                      <a:r>
-                        <a:rPr sz="1000" b="0">
-                          <a:solidFill>
-                            <a:srgbClr val="1D1B43"/>
-                          </a:solidFill>
-                          <a:latin typeface="Calibri"/>
-                        </a:rPr>
-                        <a:t>66.7%</a:t>
-                      </a:r>
-                    </a:p>
-                  </a:txBody>
-                  <a:tcPr>
-                    <a:solidFill>
-                      <a:srgbClr val="FFFFFF"/>
-                    </a:solidFill>
-                  </a:tcPr>
-                </a:tc>
-                <a:tc>
-                  <a:txBody>
-                    <a:bodyPr wrap="square"/>
-                    <a:lstStyle/>
-                    <a:p>
-                      <a:pPr algn="l"/>
-                      <a:r>
-                        <a:rPr sz="1000" b="0">
-                          <a:solidFill>
-                            <a:srgbClr val="1D1B43"/>
-                          </a:solidFill>
-                          <a:latin typeface="Calibri"/>
-                        </a:rPr>
-                        <a:t>Atencao</a:t>
-                      </a:r>
-                    </a:p>
-                  </a:txBody>
-                  <a:tcPr>
-                    <a:solidFill>
-                      <a:srgbClr val="FFFFFF"/>
-                    </a:solidFill>
-                  </a:tcPr>
-                </a:tc>
-              </a:tr>
-            </a:tbl>
-          </a:graphicData>
-        </a:graphic>
-      </p:graphicFrame>
-    </p:spTree>
-  </p:cSld>
-  <p:clrMapOvr>
-    <a:masterClrMapping/>
-  </p:clrMapOvr>
-</p:sld>
-</file>
-
-<file path=ppt/slides/slide6.xml><?xml version="1.0" encoding="utf-8"?>
-<p:sld xmlns:a="http://schemas.openxmlformats.org/drawingml/2006/main" xmlns:p="http://schemas.openxmlformats.org/presentationml/2006/main" xmlns:r="http://schemas.openxmlformats.org/officeDocument/2006/relationships">
-  <p:cSld>
-    <p:bg>
-      <p:bgPr>
-        <a:solidFill>
-          <a:srgbClr val="FFFFFF"/>
-        </a:solidFill>
-        <a:effectLst/>
-      </p:bgPr>
-    </p:bg>
-    <p:spTree>
-      <p:nvGrpSpPr>
-        <p:cNvPr id="1" name=""/>
-        <p:cNvGrpSpPr/>
-        <p:nvPr/>
-      </p:nvGrpSpPr>
-      <p:grpSpPr/>
-      <p:pic>
-        <p:nvPicPr>
-          <p:cNvPr id="2" name="Picture 1" descr="slide2_img3.png"/>
-          <p:cNvPicPr>
-            <a:picLocks noChangeAspect="1"/>
-          </p:cNvPicPr>
-          <p:nvPr/>
-        </p:nvPicPr>
-        <p:blipFill>
-          <a:blip r:embed="rId2"/>
-          <a:stretch>
-            <a:fillRect/>
-          </a:stretch>
-        </p:blipFill>
-        <p:spPr>
-          <a:xfrm>
-            <a:off x="10661904" y="155448"/>
-            <a:ext cx="1380744" cy="667512"/>
-          </a:xfrm>
-          <a:prstGeom prst="rect">
-            <a:avLst/>
-          </a:prstGeom>
-        </p:spPr>
-      </p:pic>
-      <p:sp>
-        <p:nvSpPr>
-          <p:cNvPr id="3" name="TextBox 2"/>
-          <p:cNvSpPr txBox="1"/>
-          <p:nvPr/>
-        </p:nvSpPr>
-        <p:spPr>
-          <a:xfrm>
-            <a:off x="749808" y="502920"/>
             <a:ext cx="10058400" cy="914400"/>
           </a:xfrm>
           <a:prstGeom prst="rect">
@@ -6105,7 +5583,7 @@
                 </a:solidFill>
                 <a:latin typeface="Calibri"/>
               </a:rPr>
-              <a:t>TOP DESTINATARIOS (3 pontos)</a:t>
+              <a:t>TOP DESTINATARIOS (14 pontos)</a:t>
             </a:r>
           </a:p>
         </p:txBody>
@@ -6163,7 +5641,7 @@
         </p:nvGraphicFramePr>
         <p:xfrm>
           <a:off x="365760" y="1828800"/>
-          <a:ext cx="11521440" cy="1536192"/>
+          <a:ext cx="11521440" cy="4389120"/>
         </p:xfrm>
         <a:graphic>
           <a:graphicData uri="http://schemas.openxmlformats.org/drawingml/2006/table">
@@ -6180,10 +5658,10 @@
                 <a:gridCol w="1188720"/>
                 <a:gridCol w="2926080"/>
               </a:tblGrid>
-              <a:tr h="384048">
-                <a:tc>
-                  <a:txBody>
-                    <a:bodyPr wrap="square"/>
+              <a:tr h="292608">
+                <a:tc>
+                  <a:txBody>
+                    <a:bodyPr/>
                     <a:lstStyle/>
                     <a:p>
                       <a:pPr algn="ctr"/>
@@ -6206,7 +5684,7 @@
                 </a:tc>
                 <a:tc>
                   <a:txBody>
-                    <a:bodyPr wrap="square"/>
+                    <a:bodyPr/>
                     <a:lstStyle/>
                     <a:p>
                       <a:pPr algn="ctr"/>
@@ -6229,7 +5707,7 @@
                 </a:tc>
                 <a:tc>
                   <a:txBody>
-                    <a:bodyPr wrap="square"/>
+                    <a:bodyPr/>
                     <a:lstStyle/>
                     <a:p>
                       <a:pPr algn="ctr"/>
@@ -6252,7 +5730,7 @@
                 </a:tc>
                 <a:tc>
                   <a:txBody>
-                    <a:bodyPr wrap="square"/>
+                    <a:bodyPr/>
                     <a:lstStyle/>
                     <a:p>
                       <a:pPr algn="ctr"/>
@@ -6275,7 +5753,7 @@
                 </a:tc>
                 <a:tc>
                   <a:txBody>
-                    <a:bodyPr wrap="square"/>
+                    <a:bodyPr/>
                     <a:lstStyle/>
                     <a:p>
                       <a:pPr algn="ctr"/>
@@ -6298,7 +5776,7 @@
                 </a:tc>
                 <a:tc>
                   <a:txBody>
-                    <a:bodyPr wrap="square"/>
+                    <a:bodyPr/>
                     <a:lstStyle/>
                     <a:p>
                       <a:pPr algn="ctr"/>
@@ -6321,7 +5799,7 @@
                 </a:tc>
                 <a:tc>
                   <a:txBody>
-                    <a:bodyPr wrap="square"/>
+                    <a:bodyPr/>
                     <a:lstStyle/>
                     <a:p>
                       <a:pPr algn="ctr"/>
@@ -6343,10 +5821,10 @@
                   </a:tcPr>
                 </a:tc>
               </a:tr>
-              <a:tr h="384048">
-                <a:tc>
-                  <a:txBody>
-                    <a:bodyPr wrap="square"/>
+              <a:tr h="292608">
+                <a:tc>
+                  <a:txBody>
+                    <a:bodyPr/>
                     <a:lstStyle/>
                     <a:p>
                       <a:pPr algn="l"/>
@@ -6369,7 +5847,333 @@
                 </a:tc>
                 <a:tc>
                   <a:txBody>
-                    <a:bodyPr wrap="square"/>
+                    <a:bodyPr/>
+                    <a:lstStyle/>
+                    <a:p>
+                      <a:pPr algn="l"/>
+                      <a:r>
+                        <a:rPr sz="1000" b="0">
+                          <a:solidFill>
+                            <a:srgbClr val="1D1B43"/>
+                          </a:solidFill>
+                          <a:latin typeface="Calibri"/>
+                        </a:rPr>
+                        <a:t>SUPRA ALIMENTOS E BE - SAO PAULO / SP</a:t>
+                      </a:r>
+                    </a:p>
+                  </a:txBody>
+                  <a:tcPr>
+                    <a:solidFill>
+                      <a:srgbClr val="FFFFFF"/>
+                    </a:solidFill>
+                  </a:tcPr>
+                </a:tc>
+                <a:tc>
+                  <a:txBody>
+                    <a:bodyPr/>
+                    <a:lstStyle/>
+                    <a:p>
+                      <a:pPr algn="l"/>
+                      <a:r>
+                        <a:rPr sz="1000" b="0">
+                          <a:solidFill>
+                            <a:srgbClr val="1D1B43"/>
+                          </a:solidFill>
+                          <a:latin typeface="Calibri"/>
+                        </a:rPr>
+                        <a:t>4</a:t>
+                      </a:r>
+                    </a:p>
+                  </a:txBody>
+                  <a:tcPr>
+                    <a:solidFill>
+                      <a:srgbClr val="FFFFFF"/>
+                    </a:solidFill>
+                  </a:tcPr>
+                </a:tc>
+                <a:tc>
+                  <a:txBody>
+                    <a:bodyPr/>
+                    <a:lstStyle/>
+                    <a:p>
+                      <a:pPr algn="l"/>
+                      <a:r>
+                        <a:rPr sz="1000" b="0">
+                          <a:solidFill>
+                            <a:srgbClr val="1D1B43"/>
+                          </a:solidFill>
+                          <a:latin typeface="Calibri"/>
+                        </a:rPr>
+                        <a:t>4</a:t>
+                      </a:r>
+                    </a:p>
+                  </a:txBody>
+                  <a:tcPr>
+                    <a:solidFill>
+                      <a:srgbClr val="FFFFFF"/>
+                    </a:solidFill>
+                  </a:tcPr>
+                </a:tc>
+                <a:tc>
+                  <a:txBody>
+                    <a:bodyPr/>
+                    <a:lstStyle/>
+                    <a:p>
+                      <a:pPr algn="l"/>
+                      <a:r>
+                        <a:rPr sz="1000" b="0">
+                          <a:solidFill>
+                            <a:srgbClr val="1D1B43"/>
+                          </a:solidFill>
+                          <a:latin typeface="Calibri"/>
+                        </a:rPr>
+                        <a:t>0</a:t>
+                      </a:r>
+                    </a:p>
+                  </a:txBody>
+                  <a:tcPr>
+                    <a:solidFill>
+                      <a:srgbClr val="FFFFFF"/>
+                    </a:solidFill>
+                  </a:tcPr>
+                </a:tc>
+                <a:tc>
+                  <a:txBody>
+                    <a:bodyPr/>
+                    <a:lstStyle/>
+                    <a:p>
+                      <a:pPr algn="l"/>
+                      <a:r>
+                        <a:rPr sz="1000" b="0">
+                          <a:solidFill>
+                            <a:srgbClr val="1D1B43"/>
+                          </a:solidFill>
+                          <a:latin typeface="Calibri"/>
+                        </a:rPr>
+                        <a:t>100.0%</a:t>
+                      </a:r>
+                    </a:p>
+                  </a:txBody>
+                  <a:tcPr>
+                    <a:solidFill>
+                      <a:srgbClr val="FFFFFF"/>
+                    </a:solidFill>
+                  </a:tcPr>
+                </a:tc>
+                <a:tc>
+                  <a:txBody>
+                    <a:bodyPr/>
+                    <a:lstStyle/>
+                    <a:p>
+                      <a:pPr algn="l"/>
+                      <a:r>
+                        <a:rPr sz="1000" b="0">
+                          <a:solidFill>
+                            <a:srgbClr val="1D1B43"/>
+                          </a:solidFill>
+                          <a:latin typeface="Calibri"/>
+                        </a:rPr>
+                        <a:t>Excelente</a:t>
+                      </a:r>
+                    </a:p>
+                  </a:txBody>
+                  <a:tcPr>
+                    <a:solidFill>
+                      <a:srgbClr val="FFFFFF"/>
+                    </a:solidFill>
+                  </a:tcPr>
+                </a:tc>
+              </a:tr>
+              <a:tr h="292608">
+                <a:tc>
+                  <a:txBody>
+                    <a:bodyPr/>
+                    <a:lstStyle/>
+                    <a:p>
+                      <a:pPr algn="l"/>
+                      <a:r>
+                        <a:rPr sz="1000" b="0">
+                          <a:solidFill>
+                            <a:srgbClr val="1D1B43"/>
+                          </a:solidFill>
+                          <a:latin typeface="Calibri"/>
+                        </a:rPr>
+                        <a:t>2</a:t>
+                      </a:r>
+                    </a:p>
+                  </a:txBody>
+                  <a:tcPr>
+                    <a:solidFill>
+                      <a:srgbClr val="F2F2F2"/>
+                    </a:solidFill>
+                  </a:tcPr>
+                </a:tc>
+                <a:tc>
+                  <a:txBody>
+                    <a:bodyPr/>
+                    <a:lstStyle/>
+                    <a:p>
+                      <a:pPr algn="l"/>
+                      <a:r>
+                        <a:rPr sz="1000" b="0">
+                          <a:solidFill>
+                            <a:srgbClr val="1D1B43"/>
+                          </a:solidFill>
+                          <a:latin typeface="Calibri"/>
+                        </a:rPr>
+                        <a:t>MERIDIAN DISTRIBUIDO - ITAQUAQUECETUBA / SP</a:t>
+                      </a:r>
+                    </a:p>
+                  </a:txBody>
+                  <a:tcPr>
+                    <a:solidFill>
+                      <a:srgbClr val="F2F2F2"/>
+                    </a:solidFill>
+                  </a:tcPr>
+                </a:tc>
+                <a:tc>
+                  <a:txBody>
+                    <a:bodyPr/>
+                    <a:lstStyle/>
+                    <a:p>
+                      <a:pPr algn="l"/>
+                      <a:r>
+                        <a:rPr sz="1000" b="0">
+                          <a:solidFill>
+                            <a:srgbClr val="1D1B43"/>
+                          </a:solidFill>
+                          <a:latin typeface="Calibri"/>
+                        </a:rPr>
+                        <a:t>2</a:t>
+                      </a:r>
+                    </a:p>
+                  </a:txBody>
+                  <a:tcPr>
+                    <a:solidFill>
+                      <a:srgbClr val="F2F2F2"/>
+                    </a:solidFill>
+                  </a:tcPr>
+                </a:tc>
+                <a:tc>
+                  <a:txBody>
+                    <a:bodyPr/>
+                    <a:lstStyle/>
+                    <a:p>
+                      <a:pPr algn="l"/>
+                      <a:r>
+                        <a:rPr sz="1000" b="0">
+                          <a:solidFill>
+                            <a:srgbClr val="1D1B43"/>
+                          </a:solidFill>
+                          <a:latin typeface="Calibri"/>
+                        </a:rPr>
+                        <a:t>2</a:t>
+                      </a:r>
+                    </a:p>
+                  </a:txBody>
+                  <a:tcPr>
+                    <a:solidFill>
+                      <a:srgbClr val="F2F2F2"/>
+                    </a:solidFill>
+                  </a:tcPr>
+                </a:tc>
+                <a:tc>
+                  <a:txBody>
+                    <a:bodyPr/>
+                    <a:lstStyle/>
+                    <a:p>
+                      <a:pPr algn="l"/>
+                      <a:r>
+                        <a:rPr sz="1000" b="0">
+                          <a:solidFill>
+                            <a:srgbClr val="1D1B43"/>
+                          </a:solidFill>
+                          <a:latin typeface="Calibri"/>
+                        </a:rPr>
+                        <a:t>0</a:t>
+                      </a:r>
+                    </a:p>
+                  </a:txBody>
+                  <a:tcPr>
+                    <a:solidFill>
+                      <a:srgbClr val="F2F2F2"/>
+                    </a:solidFill>
+                  </a:tcPr>
+                </a:tc>
+                <a:tc>
+                  <a:txBody>
+                    <a:bodyPr/>
+                    <a:lstStyle/>
+                    <a:p>
+                      <a:pPr algn="l"/>
+                      <a:r>
+                        <a:rPr sz="1000" b="0">
+                          <a:solidFill>
+                            <a:srgbClr val="1D1B43"/>
+                          </a:solidFill>
+                          <a:latin typeface="Calibri"/>
+                        </a:rPr>
+                        <a:t>100.0%</a:t>
+                      </a:r>
+                    </a:p>
+                  </a:txBody>
+                  <a:tcPr>
+                    <a:solidFill>
+                      <a:srgbClr val="F2F2F2"/>
+                    </a:solidFill>
+                  </a:tcPr>
+                </a:tc>
+                <a:tc>
+                  <a:txBody>
+                    <a:bodyPr/>
+                    <a:lstStyle/>
+                    <a:p>
+                      <a:pPr algn="l"/>
+                      <a:r>
+                        <a:rPr sz="1000" b="0">
+                          <a:solidFill>
+                            <a:srgbClr val="1D1B43"/>
+                          </a:solidFill>
+                          <a:latin typeface="Calibri"/>
+                        </a:rPr>
+                        <a:t>Excelente</a:t>
+                      </a:r>
+                    </a:p>
+                  </a:txBody>
+                  <a:tcPr>
+                    <a:solidFill>
+                      <a:srgbClr val="F2F2F2"/>
+                    </a:solidFill>
+                  </a:tcPr>
+                </a:tc>
+              </a:tr>
+              <a:tr h="292608">
+                <a:tc>
+                  <a:txBody>
+                    <a:bodyPr/>
+                    <a:lstStyle/>
+                    <a:p>
+                      <a:pPr algn="l"/>
+                      <a:r>
+                        <a:rPr sz="1000" b="0">
+                          <a:solidFill>
+                            <a:srgbClr val="1D1B43"/>
+                          </a:solidFill>
+                          <a:latin typeface="Calibri"/>
+                        </a:rPr>
+                        <a:t>3</a:t>
+                      </a:r>
+                    </a:p>
+                  </a:txBody>
+                  <a:tcPr>
+                    <a:solidFill>
+                      <a:srgbClr val="FFFFFF"/>
+                    </a:solidFill>
+                  </a:tcPr>
+                </a:tc>
+                <a:tc>
+                  <a:txBody>
+                    <a:bodyPr/>
                     <a:lstStyle/>
                     <a:p>
                       <a:pPr algn="l"/>
@@ -6392,7 +6196,7 @@
                 </a:tc>
                 <a:tc>
                   <a:txBody>
-                    <a:bodyPr wrap="square"/>
+                    <a:bodyPr/>
                     <a:lstStyle/>
                     <a:p>
                       <a:pPr algn="l"/>
@@ -6415,7 +6219,30 @@
                 </a:tc>
                 <a:tc>
                   <a:txBody>
-                    <a:bodyPr wrap="square"/>
+                    <a:bodyPr/>
+                    <a:lstStyle/>
+                    <a:p>
+                      <a:pPr algn="l"/>
+                      <a:r>
+                        <a:rPr sz="1000" b="0">
+                          <a:solidFill>
+                            <a:srgbClr val="1D1B43"/>
+                          </a:solidFill>
+                          <a:latin typeface="Calibri"/>
+                        </a:rPr>
+                        <a:t>1</a:t>
+                      </a:r>
+                    </a:p>
+                  </a:txBody>
+                  <a:tcPr>
+                    <a:solidFill>
+                      <a:srgbClr val="FFFFFF"/>
+                    </a:solidFill>
+                  </a:tcPr>
+                </a:tc>
+                <a:tc>
+                  <a:txBody>
+                    <a:bodyPr/>
                     <a:lstStyle/>
                     <a:p>
                       <a:pPr algn="l"/>
@@ -6438,7 +6265,101 @@
                 </a:tc>
                 <a:tc>
                   <a:txBody>
-                    <a:bodyPr wrap="square"/>
+                    <a:bodyPr/>
+                    <a:lstStyle/>
+                    <a:p>
+                      <a:pPr algn="l"/>
+                      <a:r>
+                        <a:rPr sz="1000" b="0">
+                          <a:solidFill>
+                            <a:srgbClr val="1D1B43"/>
+                          </a:solidFill>
+                          <a:latin typeface="Calibri"/>
+                        </a:rPr>
+                        <a:t>100.0%</a:t>
+                      </a:r>
+                    </a:p>
+                  </a:txBody>
+                  <a:tcPr>
+                    <a:solidFill>
+                      <a:srgbClr val="FFFFFF"/>
+                    </a:solidFill>
+                  </a:tcPr>
+                </a:tc>
+                <a:tc>
+                  <a:txBody>
+                    <a:bodyPr/>
+                    <a:lstStyle/>
+                    <a:p>
+                      <a:pPr algn="l"/>
+                      <a:r>
+                        <a:rPr sz="1000" b="0">
+                          <a:solidFill>
+                            <a:srgbClr val="1D1B43"/>
+                          </a:solidFill>
+                          <a:latin typeface="Calibri"/>
+                        </a:rPr>
+                        <a:t>Excelente</a:t>
+                      </a:r>
+                    </a:p>
+                  </a:txBody>
+                  <a:tcPr>
+                    <a:solidFill>
+                      <a:srgbClr val="FFFFFF"/>
+                    </a:solidFill>
+                  </a:tcPr>
+                </a:tc>
+              </a:tr>
+              <a:tr h="292608">
+                <a:tc>
+                  <a:txBody>
+                    <a:bodyPr/>
+                    <a:lstStyle/>
+                    <a:p>
+                      <a:pPr algn="l"/>
+                      <a:r>
+                        <a:rPr sz="1000" b="0">
+                          <a:solidFill>
+                            <a:srgbClr val="1D1B43"/>
+                          </a:solidFill>
+                          <a:latin typeface="Calibri"/>
+                        </a:rPr>
+                        <a:t>4</a:t>
+                      </a:r>
+                    </a:p>
+                  </a:txBody>
+                  <a:tcPr>
+                    <a:solidFill>
+                      <a:srgbClr val="F2F2F2"/>
+                    </a:solidFill>
+                  </a:tcPr>
+                </a:tc>
+                <a:tc>
+                  <a:txBody>
+                    <a:bodyPr/>
+                    <a:lstStyle/>
+                    <a:p>
+                      <a:pPr algn="l"/>
+                      <a:r>
+                        <a:rPr sz="1000" b="0">
+                          <a:solidFill>
+                            <a:srgbClr val="1D1B43"/>
+                          </a:solidFill>
+                          <a:latin typeface="Calibri"/>
+                        </a:rPr>
+                        <a:t>LTP COMERCIO DE VINH - ITATIBA / SP</a:t>
+                      </a:r>
+                    </a:p>
+                  </a:txBody>
+                  <a:tcPr>
+                    <a:solidFill>
+                      <a:srgbClr val="F2F2F2"/>
+                    </a:solidFill>
+                  </a:tcPr>
+                </a:tc>
+                <a:tc>
+                  <a:txBody>
+                    <a:bodyPr/>
                     <a:lstStyle/>
                     <a:p>
                       <a:pPr algn="l"/>
@@ -6455,24 +6376,141 @@
                   </a:txBody>
                   <a:tcPr>
                     <a:solidFill>
+                      <a:srgbClr val="F2F2F2"/>
+                    </a:solidFill>
+                  </a:tcPr>
+                </a:tc>
+                <a:tc>
+                  <a:txBody>
+                    <a:bodyPr/>
+                    <a:lstStyle/>
+                    <a:p>
+                      <a:pPr algn="l"/>
+                      <a:r>
+                        <a:rPr sz="1000" b="0">
+                          <a:solidFill>
+                            <a:srgbClr val="1D1B43"/>
+                          </a:solidFill>
+                          <a:latin typeface="Calibri"/>
+                        </a:rPr>
+                        <a:t>1</a:t>
+                      </a:r>
+                    </a:p>
+                  </a:txBody>
+                  <a:tcPr>
+                    <a:solidFill>
+                      <a:srgbClr val="F2F2F2"/>
+                    </a:solidFill>
+                  </a:tcPr>
+                </a:tc>
+                <a:tc>
+                  <a:txBody>
+                    <a:bodyPr/>
+                    <a:lstStyle/>
+                    <a:p>
+                      <a:pPr algn="l"/>
+                      <a:r>
+                        <a:rPr sz="1000" b="0">
+                          <a:solidFill>
+                            <a:srgbClr val="1D1B43"/>
+                          </a:solidFill>
+                          <a:latin typeface="Calibri"/>
+                        </a:rPr>
+                        <a:t>0</a:t>
+                      </a:r>
+                    </a:p>
+                  </a:txBody>
+                  <a:tcPr>
+                    <a:solidFill>
+                      <a:srgbClr val="F2F2F2"/>
+                    </a:solidFill>
+                  </a:tcPr>
+                </a:tc>
+                <a:tc>
+                  <a:txBody>
+                    <a:bodyPr/>
+                    <a:lstStyle/>
+                    <a:p>
+                      <a:pPr algn="l"/>
+                      <a:r>
+                        <a:rPr sz="1000" b="0">
+                          <a:solidFill>
+                            <a:srgbClr val="1D1B43"/>
+                          </a:solidFill>
+                          <a:latin typeface="Calibri"/>
+                        </a:rPr>
+                        <a:t>100.0%</a:t>
+                      </a:r>
+                    </a:p>
+                  </a:txBody>
+                  <a:tcPr>
+                    <a:solidFill>
+                      <a:srgbClr val="F2F2F2"/>
+                    </a:solidFill>
+                  </a:tcPr>
+                </a:tc>
+                <a:tc>
+                  <a:txBody>
+                    <a:bodyPr/>
+                    <a:lstStyle/>
+                    <a:p>
+                      <a:pPr algn="l"/>
+                      <a:r>
+                        <a:rPr sz="1000" b="0">
+                          <a:solidFill>
+                            <a:srgbClr val="1D1B43"/>
+                          </a:solidFill>
+                          <a:latin typeface="Calibri"/>
+                        </a:rPr>
+                        <a:t>Excelente</a:t>
+                      </a:r>
+                    </a:p>
+                  </a:txBody>
+                  <a:tcPr>
+                    <a:solidFill>
+                      <a:srgbClr val="F2F2F2"/>
+                    </a:solidFill>
+                  </a:tcPr>
+                </a:tc>
+              </a:tr>
+              <a:tr h="292608">
+                <a:tc>
+                  <a:txBody>
+                    <a:bodyPr/>
+                    <a:lstStyle/>
+                    <a:p>
+                      <a:pPr algn="l"/>
+                      <a:r>
+                        <a:rPr sz="1000" b="0">
+                          <a:solidFill>
+                            <a:srgbClr val="1D1B43"/>
+                          </a:solidFill>
+                          <a:latin typeface="Calibri"/>
+                        </a:rPr>
+                        <a:t>5</a:t>
+                      </a:r>
+                    </a:p>
+                  </a:txBody>
+                  <a:tcPr>
+                    <a:solidFill>
                       <a:srgbClr val="FFFFFF"/>
                     </a:solidFill>
                   </a:tcPr>
                 </a:tc>
                 <a:tc>
                   <a:txBody>
-                    <a:bodyPr wrap="square"/>
-                    <a:lstStyle/>
-                    <a:p>
-                      <a:pPr algn="l"/>
-                      <a:r>
-                        <a:rPr sz="1000" b="0">
-                          <a:solidFill>
-                            <a:srgbClr val="1D1B43"/>
-                          </a:solidFill>
-                          <a:latin typeface="Calibri"/>
-                        </a:rPr>
-                        <a:t>0.0%</a:t>
+                    <a:bodyPr/>
+                    <a:lstStyle/>
+                    <a:p>
+                      <a:pPr algn="l"/>
+                      <a:r>
+                        <a:rPr sz="1000" b="0">
+                          <a:solidFill>
+                            <a:srgbClr val="1D1B43"/>
+                          </a:solidFill>
+                          <a:latin typeface="Calibri"/>
+                        </a:rPr>
+                        <a:t>O. S. J. COMERCIO DE - SAO JOSE DOS CAMPOS / SP</a:t>
                       </a:r>
                     </a:p>
                   </a:txBody>
@@ -6484,18 +6522,18 @@
                 </a:tc>
                 <a:tc>
                   <a:txBody>
-                    <a:bodyPr wrap="square"/>
-                    <a:lstStyle/>
-                    <a:p>
-                      <a:pPr algn="l"/>
-                      <a:r>
-                        <a:rPr sz="1000" b="0">
-                          <a:solidFill>
-                            <a:srgbClr val="1D1B43"/>
-                          </a:solidFill>
-                          <a:latin typeface="Calibri"/>
-                        </a:rPr>
-                        <a:t>Atencao</a:t>
+                    <a:bodyPr/>
+                    <a:lstStyle/>
+                    <a:p>
+                      <a:pPr algn="l"/>
+                      <a:r>
+                        <a:rPr sz="1000" b="0">
+                          <a:solidFill>
+                            <a:srgbClr val="1D1B43"/>
+                          </a:solidFill>
+                          <a:latin typeface="Calibri"/>
+                        </a:rPr>
+                        <a:t>1</a:t>
                       </a:r>
                     </a:p>
                   </a:txBody>
@@ -6505,22 +6543,114 @@
                     </a:solidFill>
                   </a:tcPr>
                 </a:tc>
+                <a:tc>
+                  <a:txBody>
+                    <a:bodyPr/>
+                    <a:lstStyle/>
+                    <a:p>
+                      <a:pPr algn="l"/>
+                      <a:r>
+                        <a:rPr sz="1000" b="0">
+                          <a:solidFill>
+                            <a:srgbClr val="1D1B43"/>
+                          </a:solidFill>
+                          <a:latin typeface="Calibri"/>
+                        </a:rPr>
+                        <a:t>1</a:t>
+                      </a:r>
+                    </a:p>
+                  </a:txBody>
+                  <a:tcPr>
+                    <a:solidFill>
+                      <a:srgbClr val="FFFFFF"/>
+                    </a:solidFill>
+                  </a:tcPr>
+                </a:tc>
+                <a:tc>
+                  <a:txBody>
+                    <a:bodyPr/>
+                    <a:lstStyle/>
+                    <a:p>
+                      <a:pPr algn="l"/>
+                      <a:r>
+                        <a:rPr sz="1000" b="0">
+                          <a:solidFill>
+                            <a:srgbClr val="1D1B43"/>
+                          </a:solidFill>
+                          <a:latin typeface="Calibri"/>
+                        </a:rPr>
+                        <a:t>0</a:t>
+                      </a:r>
+                    </a:p>
+                  </a:txBody>
+                  <a:tcPr>
+                    <a:solidFill>
+                      <a:srgbClr val="FFFFFF"/>
+                    </a:solidFill>
+                  </a:tcPr>
+                </a:tc>
+                <a:tc>
+                  <a:txBody>
+                    <a:bodyPr/>
+                    <a:lstStyle/>
+                    <a:p>
+                      <a:pPr algn="l"/>
+                      <a:r>
+                        <a:rPr sz="1000" b="0">
+                          <a:solidFill>
+                            <a:srgbClr val="1D1B43"/>
+                          </a:solidFill>
+                          <a:latin typeface="Calibri"/>
+                        </a:rPr>
+                        <a:t>100.0%</a:t>
+                      </a:r>
+                    </a:p>
+                  </a:txBody>
+                  <a:tcPr>
+                    <a:solidFill>
+                      <a:srgbClr val="FFFFFF"/>
+                    </a:solidFill>
+                  </a:tcPr>
+                </a:tc>
+                <a:tc>
+                  <a:txBody>
+                    <a:bodyPr/>
+                    <a:lstStyle/>
+                    <a:p>
+                      <a:pPr algn="l"/>
+                      <a:r>
+                        <a:rPr sz="1000" b="0">
+                          <a:solidFill>
+                            <a:srgbClr val="1D1B43"/>
+                          </a:solidFill>
+                          <a:latin typeface="Calibri"/>
+                        </a:rPr>
+                        <a:t>Excelente</a:t>
+                      </a:r>
+                    </a:p>
+                  </a:txBody>
+                  <a:tcPr>
+                    <a:solidFill>
+                      <a:srgbClr val="FFFFFF"/>
+                    </a:solidFill>
+                  </a:tcPr>
+                </a:tc>
               </a:tr>
-              <a:tr h="384048">
-                <a:tc>
-                  <a:txBody>
-                    <a:bodyPr wrap="square"/>
-                    <a:lstStyle/>
-                    <a:p>
-                      <a:pPr algn="l"/>
-                      <a:r>
-                        <a:rPr sz="1000" b="0">
-                          <a:solidFill>
-                            <a:srgbClr val="1D1B43"/>
-                          </a:solidFill>
-                          <a:latin typeface="Calibri"/>
-                        </a:rPr>
-                        <a:t>2</a:t>
+              <a:tr h="292608">
+                <a:tc>
+                  <a:txBody>
+                    <a:bodyPr/>
+                    <a:lstStyle/>
+                    <a:p>
+                      <a:pPr algn="l"/>
+                      <a:r>
+                        <a:rPr sz="1000" b="0">
+                          <a:solidFill>
+                            <a:srgbClr val="1D1B43"/>
+                          </a:solidFill>
+                          <a:latin typeface="Calibri"/>
+                        </a:rPr>
+                        <a:t>6</a:t>
                       </a:r>
                     </a:p>
                   </a:txBody>
@@ -6532,7 +6662,1148 @@
                 </a:tc>
                 <a:tc>
                   <a:txBody>
-                    <a:bodyPr wrap="square"/>
+                    <a:bodyPr/>
+                    <a:lstStyle/>
+                    <a:p>
+                      <a:pPr algn="l"/>
+                      <a:r>
+                        <a:rPr sz="1000" b="0">
+                          <a:solidFill>
+                            <a:srgbClr val="1D1B43"/>
+                          </a:solidFill>
+                          <a:latin typeface="Calibri"/>
+                        </a:rPr>
+                        <a:t>CARAVAGGIO WINE BOUT - GUARULHOS / SP</a:t>
+                      </a:r>
+                    </a:p>
+                  </a:txBody>
+                  <a:tcPr>
+                    <a:solidFill>
+                      <a:srgbClr val="F2F2F2"/>
+                    </a:solidFill>
+                  </a:tcPr>
+                </a:tc>
+                <a:tc>
+                  <a:txBody>
+                    <a:bodyPr/>
+                    <a:lstStyle/>
+                    <a:p>
+                      <a:pPr algn="l"/>
+                      <a:r>
+                        <a:rPr sz="1000" b="0">
+                          <a:solidFill>
+                            <a:srgbClr val="1D1B43"/>
+                          </a:solidFill>
+                          <a:latin typeface="Calibri"/>
+                        </a:rPr>
+                        <a:t>1</a:t>
+                      </a:r>
+                    </a:p>
+                  </a:txBody>
+                  <a:tcPr>
+                    <a:solidFill>
+                      <a:srgbClr val="F2F2F2"/>
+                    </a:solidFill>
+                  </a:tcPr>
+                </a:tc>
+                <a:tc>
+                  <a:txBody>
+                    <a:bodyPr/>
+                    <a:lstStyle/>
+                    <a:p>
+                      <a:pPr algn="l"/>
+                      <a:r>
+                        <a:rPr sz="1000" b="0">
+                          <a:solidFill>
+                            <a:srgbClr val="1D1B43"/>
+                          </a:solidFill>
+                          <a:latin typeface="Calibri"/>
+                        </a:rPr>
+                        <a:t>1</a:t>
+                      </a:r>
+                    </a:p>
+                  </a:txBody>
+                  <a:tcPr>
+                    <a:solidFill>
+                      <a:srgbClr val="F2F2F2"/>
+                    </a:solidFill>
+                  </a:tcPr>
+                </a:tc>
+                <a:tc>
+                  <a:txBody>
+                    <a:bodyPr/>
+                    <a:lstStyle/>
+                    <a:p>
+                      <a:pPr algn="l"/>
+                      <a:r>
+                        <a:rPr sz="1000" b="0">
+                          <a:solidFill>
+                            <a:srgbClr val="1D1B43"/>
+                          </a:solidFill>
+                          <a:latin typeface="Calibri"/>
+                        </a:rPr>
+                        <a:t>0</a:t>
+                      </a:r>
+                    </a:p>
+                  </a:txBody>
+                  <a:tcPr>
+                    <a:solidFill>
+                      <a:srgbClr val="F2F2F2"/>
+                    </a:solidFill>
+                  </a:tcPr>
+                </a:tc>
+                <a:tc>
+                  <a:txBody>
+                    <a:bodyPr/>
+                    <a:lstStyle/>
+                    <a:p>
+                      <a:pPr algn="l"/>
+                      <a:r>
+                        <a:rPr sz="1000" b="0">
+                          <a:solidFill>
+                            <a:srgbClr val="1D1B43"/>
+                          </a:solidFill>
+                          <a:latin typeface="Calibri"/>
+                        </a:rPr>
+                        <a:t>100.0%</a:t>
+                      </a:r>
+                    </a:p>
+                  </a:txBody>
+                  <a:tcPr>
+                    <a:solidFill>
+                      <a:srgbClr val="F2F2F2"/>
+                    </a:solidFill>
+                  </a:tcPr>
+                </a:tc>
+                <a:tc>
+                  <a:txBody>
+                    <a:bodyPr/>
+                    <a:lstStyle/>
+                    <a:p>
+                      <a:pPr algn="l"/>
+                      <a:r>
+                        <a:rPr sz="1000" b="0">
+                          <a:solidFill>
+                            <a:srgbClr val="1D1B43"/>
+                          </a:solidFill>
+                          <a:latin typeface="Calibri"/>
+                        </a:rPr>
+                        <a:t>Excelente</a:t>
+                      </a:r>
+                    </a:p>
+                  </a:txBody>
+                  <a:tcPr>
+                    <a:solidFill>
+                      <a:srgbClr val="F2F2F2"/>
+                    </a:solidFill>
+                  </a:tcPr>
+                </a:tc>
+              </a:tr>
+              <a:tr h="292608">
+                <a:tc>
+                  <a:txBody>
+                    <a:bodyPr/>
+                    <a:lstStyle/>
+                    <a:p>
+                      <a:pPr algn="l"/>
+                      <a:r>
+                        <a:rPr sz="1000" b="0">
+                          <a:solidFill>
+                            <a:srgbClr val="1D1B43"/>
+                          </a:solidFill>
+                          <a:latin typeface="Calibri"/>
+                        </a:rPr>
+                        <a:t>7</a:t>
+                      </a:r>
+                    </a:p>
+                  </a:txBody>
+                  <a:tcPr>
+                    <a:solidFill>
+                      <a:srgbClr val="FFFFFF"/>
+                    </a:solidFill>
+                  </a:tcPr>
+                </a:tc>
+                <a:tc>
+                  <a:txBody>
+                    <a:bodyPr/>
+                    <a:lstStyle/>
+                    <a:p>
+                      <a:pPr algn="l"/>
+                      <a:r>
+                        <a:rPr sz="1000" b="0">
+                          <a:solidFill>
+                            <a:srgbClr val="1D1B43"/>
+                          </a:solidFill>
+                          <a:latin typeface="Calibri"/>
+                        </a:rPr>
+                        <a:t>RENATO BOZZINI CARLU - SAO PAULO / SP</a:t>
+                      </a:r>
+                    </a:p>
+                  </a:txBody>
+                  <a:tcPr>
+                    <a:solidFill>
+                      <a:srgbClr val="FFFFFF"/>
+                    </a:solidFill>
+                  </a:tcPr>
+                </a:tc>
+                <a:tc>
+                  <a:txBody>
+                    <a:bodyPr/>
+                    <a:lstStyle/>
+                    <a:p>
+                      <a:pPr algn="l"/>
+                      <a:r>
+                        <a:rPr sz="1000" b="0">
+                          <a:solidFill>
+                            <a:srgbClr val="1D1B43"/>
+                          </a:solidFill>
+                          <a:latin typeface="Calibri"/>
+                        </a:rPr>
+                        <a:t>1</a:t>
+                      </a:r>
+                    </a:p>
+                  </a:txBody>
+                  <a:tcPr>
+                    <a:solidFill>
+                      <a:srgbClr val="FFFFFF"/>
+                    </a:solidFill>
+                  </a:tcPr>
+                </a:tc>
+                <a:tc>
+                  <a:txBody>
+                    <a:bodyPr/>
+                    <a:lstStyle/>
+                    <a:p>
+                      <a:pPr algn="l"/>
+                      <a:r>
+                        <a:rPr sz="1000" b="0">
+                          <a:solidFill>
+                            <a:srgbClr val="1D1B43"/>
+                          </a:solidFill>
+                          <a:latin typeface="Calibri"/>
+                        </a:rPr>
+                        <a:t>1</a:t>
+                      </a:r>
+                    </a:p>
+                  </a:txBody>
+                  <a:tcPr>
+                    <a:solidFill>
+                      <a:srgbClr val="FFFFFF"/>
+                    </a:solidFill>
+                  </a:tcPr>
+                </a:tc>
+                <a:tc>
+                  <a:txBody>
+                    <a:bodyPr/>
+                    <a:lstStyle/>
+                    <a:p>
+                      <a:pPr algn="l"/>
+                      <a:r>
+                        <a:rPr sz="1000" b="0">
+                          <a:solidFill>
+                            <a:srgbClr val="1D1B43"/>
+                          </a:solidFill>
+                          <a:latin typeface="Calibri"/>
+                        </a:rPr>
+                        <a:t>0</a:t>
+                      </a:r>
+                    </a:p>
+                  </a:txBody>
+                  <a:tcPr>
+                    <a:solidFill>
+                      <a:srgbClr val="FFFFFF"/>
+                    </a:solidFill>
+                  </a:tcPr>
+                </a:tc>
+                <a:tc>
+                  <a:txBody>
+                    <a:bodyPr/>
+                    <a:lstStyle/>
+                    <a:p>
+                      <a:pPr algn="l"/>
+                      <a:r>
+                        <a:rPr sz="1000" b="0">
+                          <a:solidFill>
+                            <a:srgbClr val="1D1B43"/>
+                          </a:solidFill>
+                          <a:latin typeface="Calibri"/>
+                        </a:rPr>
+                        <a:t>100.0%</a:t>
+                      </a:r>
+                    </a:p>
+                  </a:txBody>
+                  <a:tcPr>
+                    <a:solidFill>
+                      <a:srgbClr val="FFFFFF"/>
+                    </a:solidFill>
+                  </a:tcPr>
+                </a:tc>
+                <a:tc>
+                  <a:txBody>
+                    <a:bodyPr/>
+                    <a:lstStyle/>
+                    <a:p>
+                      <a:pPr algn="l"/>
+                      <a:r>
+                        <a:rPr sz="1000" b="0">
+                          <a:solidFill>
+                            <a:srgbClr val="1D1B43"/>
+                          </a:solidFill>
+                          <a:latin typeface="Calibri"/>
+                        </a:rPr>
+                        <a:t>Excelente</a:t>
+                      </a:r>
+                    </a:p>
+                  </a:txBody>
+                  <a:tcPr>
+                    <a:solidFill>
+                      <a:srgbClr val="FFFFFF"/>
+                    </a:solidFill>
+                  </a:tcPr>
+                </a:tc>
+              </a:tr>
+              <a:tr h="292608">
+                <a:tc>
+                  <a:txBody>
+                    <a:bodyPr/>
+                    <a:lstStyle/>
+                    <a:p>
+                      <a:pPr algn="l"/>
+                      <a:r>
+                        <a:rPr sz="1000" b="0">
+                          <a:solidFill>
+                            <a:srgbClr val="1D1B43"/>
+                          </a:solidFill>
+                          <a:latin typeface="Calibri"/>
+                        </a:rPr>
+                        <a:t>8</a:t>
+                      </a:r>
+                    </a:p>
+                  </a:txBody>
+                  <a:tcPr>
+                    <a:solidFill>
+                      <a:srgbClr val="F2F2F2"/>
+                    </a:solidFill>
+                  </a:tcPr>
+                </a:tc>
+                <a:tc>
+                  <a:txBody>
+                    <a:bodyPr/>
+                    <a:lstStyle/>
+                    <a:p>
+                      <a:pPr algn="l"/>
+                      <a:r>
+                        <a:rPr sz="1000" b="0">
+                          <a:solidFill>
+                            <a:srgbClr val="1D1B43"/>
+                          </a:solidFill>
+                          <a:latin typeface="Calibri"/>
+                        </a:rPr>
+                        <a:t>RESTAURANTES CAMBUI - CAMPINAS / SP</a:t>
+                      </a:r>
+                    </a:p>
+                  </a:txBody>
+                  <a:tcPr>
+                    <a:solidFill>
+                      <a:srgbClr val="F2F2F2"/>
+                    </a:solidFill>
+                  </a:tcPr>
+                </a:tc>
+                <a:tc>
+                  <a:txBody>
+                    <a:bodyPr/>
+                    <a:lstStyle/>
+                    <a:p>
+                      <a:pPr algn="l"/>
+                      <a:r>
+                        <a:rPr sz="1000" b="0">
+                          <a:solidFill>
+                            <a:srgbClr val="1D1B43"/>
+                          </a:solidFill>
+                          <a:latin typeface="Calibri"/>
+                        </a:rPr>
+                        <a:t>1</a:t>
+                      </a:r>
+                    </a:p>
+                  </a:txBody>
+                  <a:tcPr>
+                    <a:solidFill>
+                      <a:srgbClr val="F2F2F2"/>
+                    </a:solidFill>
+                  </a:tcPr>
+                </a:tc>
+                <a:tc>
+                  <a:txBody>
+                    <a:bodyPr/>
+                    <a:lstStyle/>
+                    <a:p>
+                      <a:pPr algn="l"/>
+                      <a:r>
+                        <a:rPr sz="1000" b="0">
+                          <a:solidFill>
+                            <a:srgbClr val="1D1B43"/>
+                          </a:solidFill>
+                          <a:latin typeface="Calibri"/>
+                        </a:rPr>
+                        <a:t>1</a:t>
+                      </a:r>
+                    </a:p>
+                  </a:txBody>
+                  <a:tcPr>
+                    <a:solidFill>
+                      <a:srgbClr val="F2F2F2"/>
+                    </a:solidFill>
+                  </a:tcPr>
+                </a:tc>
+                <a:tc>
+                  <a:txBody>
+                    <a:bodyPr/>
+                    <a:lstStyle/>
+                    <a:p>
+                      <a:pPr algn="l"/>
+                      <a:r>
+                        <a:rPr sz="1000" b="0">
+                          <a:solidFill>
+                            <a:srgbClr val="1D1B43"/>
+                          </a:solidFill>
+                          <a:latin typeface="Calibri"/>
+                        </a:rPr>
+                        <a:t>0</a:t>
+                      </a:r>
+                    </a:p>
+                  </a:txBody>
+                  <a:tcPr>
+                    <a:solidFill>
+                      <a:srgbClr val="F2F2F2"/>
+                    </a:solidFill>
+                  </a:tcPr>
+                </a:tc>
+                <a:tc>
+                  <a:txBody>
+                    <a:bodyPr/>
+                    <a:lstStyle/>
+                    <a:p>
+                      <a:pPr algn="l"/>
+                      <a:r>
+                        <a:rPr sz="1000" b="0">
+                          <a:solidFill>
+                            <a:srgbClr val="1D1B43"/>
+                          </a:solidFill>
+                          <a:latin typeface="Calibri"/>
+                        </a:rPr>
+                        <a:t>100.0%</a:t>
+                      </a:r>
+                    </a:p>
+                  </a:txBody>
+                  <a:tcPr>
+                    <a:solidFill>
+                      <a:srgbClr val="F2F2F2"/>
+                    </a:solidFill>
+                  </a:tcPr>
+                </a:tc>
+                <a:tc>
+                  <a:txBody>
+                    <a:bodyPr/>
+                    <a:lstStyle/>
+                    <a:p>
+                      <a:pPr algn="l"/>
+                      <a:r>
+                        <a:rPr sz="1000" b="0">
+                          <a:solidFill>
+                            <a:srgbClr val="1D1B43"/>
+                          </a:solidFill>
+                          <a:latin typeface="Calibri"/>
+                        </a:rPr>
+                        <a:t>Excelente</a:t>
+                      </a:r>
+                    </a:p>
+                  </a:txBody>
+                  <a:tcPr>
+                    <a:solidFill>
+                      <a:srgbClr val="F2F2F2"/>
+                    </a:solidFill>
+                  </a:tcPr>
+                </a:tc>
+              </a:tr>
+              <a:tr h="292608">
+                <a:tc>
+                  <a:txBody>
+                    <a:bodyPr/>
+                    <a:lstStyle/>
+                    <a:p>
+                      <a:pPr algn="l"/>
+                      <a:r>
+                        <a:rPr sz="1000" b="0">
+                          <a:solidFill>
+                            <a:srgbClr val="1D1B43"/>
+                          </a:solidFill>
+                          <a:latin typeface="Calibri"/>
+                        </a:rPr>
+                        <a:t>9</a:t>
+                      </a:r>
+                    </a:p>
+                  </a:txBody>
+                  <a:tcPr>
+                    <a:solidFill>
+                      <a:srgbClr val="FFFFFF"/>
+                    </a:solidFill>
+                  </a:tcPr>
+                </a:tc>
+                <a:tc>
+                  <a:txBody>
+                    <a:bodyPr/>
+                    <a:lstStyle/>
+                    <a:p>
+                      <a:pPr algn="l"/>
+                      <a:r>
+                        <a:rPr sz="1000" b="0">
+                          <a:solidFill>
+                            <a:srgbClr val="1D1B43"/>
+                          </a:solidFill>
+                          <a:latin typeface="Calibri"/>
+                        </a:rPr>
+                        <a:t>ROBERTO FULANETE - INDAIATUBA / SP</a:t>
+                      </a:r>
+                    </a:p>
+                  </a:txBody>
+                  <a:tcPr>
+                    <a:solidFill>
+                      <a:srgbClr val="FFFFFF"/>
+                    </a:solidFill>
+                  </a:tcPr>
+                </a:tc>
+                <a:tc>
+                  <a:txBody>
+                    <a:bodyPr/>
+                    <a:lstStyle/>
+                    <a:p>
+                      <a:pPr algn="l"/>
+                      <a:r>
+                        <a:rPr sz="1000" b="0">
+                          <a:solidFill>
+                            <a:srgbClr val="1D1B43"/>
+                          </a:solidFill>
+                          <a:latin typeface="Calibri"/>
+                        </a:rPr>
+                        <a:t>1</a:t>
+                      </a:r>
+                    </a:p>
+                  </a:txBody>
+                  <a:tcPr>
+                    <a:solidFill>
+                      <a:srgbClr val="FFFFFF"/>
+                    </a:solidFill>
+                  </a:tcPr>
+                </a:tc>
+                <a:tc>
+                  <a:txBody>
+                    <a:bodyPr/>
+                    <a:lstStyle/>
+                    <a:p>
+                      <a:pPr algn="l"/>
+                      <a:r>
+                        <a:rPr sz="1000" b="0">
+                          <a:solidFill>
+                            <a:srgbClr val="1D1B43"/>
+                          </a:solidFill>
+                          <a:latin typeface="Calibri"/>
+                        </a:rPr>
+                        <a:t>1</a:t>
+                      </a:r>
+                    </a:p>
+                  </a:txBody>
+                  <a:tcPr>
+                    <a:solidFill>
+                      <a:srgbClr val="FFFFFF"/>
+                    </a:solidFill>
+                  </a:tcPr>
+                </a:tc>
+                <a:tc>
+                  <a:txBody>
+                    <a:bodyPr/>
+                    <a:lstStyle/>
+                    <a:p>
+                      <a:pPr algn="l"/>
+                      <a:r>
+                        <a:rPr sz="1000" b="0">
+                          <a:solidFill>
+                            <a:srgbClr val="1D1B43"/>
+                          </a:solidFill>
+                          <a:latin typeface="Calibri"/>
+                        </a:rPr>
+                        <a:t>0</a:t>
+                      </a:r>
+                    </a:p>
+                  </a:txBody>
+                  <a:tcPr>
+                    <a:solidFill>
+                      <a:srgbClr val="FFFFFF"/>
+                    </a:solidFill>
+                  </a:tcPr>
+                </a:tc>
+                <a:tc>
+                  <a:txBody>
+                    <a:bodyPr/>
+                    <a:lstStyle/>
+                    <a:p>
+                      <a:pPr algn="l"/>
+                      <a:r>
+                        <a:rPr sz="1000" b="0">
+                          <a:solidFill>
+                            <a:srgbClr val="1D1B43"/>
+                          </a:solidFill>
+                          <a:latin typeface="Calibri"/>
+                        </a:rPr>
+                        <a:t>100.0%</a:t>
+                      </a:r>
+                    </a:p>
+                  </a:txBody>
+                  <a:tcPr>
+                    <a:solidFill>
+                      <a:srgbClr val="FFFFFF"/>
+                    </a:solidFill>
+                  </a:tcPr>
+                </a:tc>
+                <a:tc>
+                  <a:txBody>
+                    <a:bodyPr/>
+                    <a:lstStyle/>
+                    <a:p>
+                      <a:pPr algn="l"/>
+                      <a:r>
+                        <a:rPr sz="1000" b="0">
+                          <a:solidFill>
+                            <a:srgbClr val="1D1B43"/>
+                          </a:solidFill>
+                          <a:latin typeface="Calibri"/>
+                        </a:rPr>
+                        <a:t>Excelente</a:t>
+                      </a:r>
+                    </a:p>
+                  </a:txBody>
+                  <a:tcPr>
+                    <a:solidFill>
+                      <a:srgbClr val="FFFFFF"/>
+                    </a:solidFill>
+                  </a:tcPr>
+                </a:tc>
+              </a:tr>
+              <a:tr h="292608">
+                <a:tc>
+                  <a:txBody>
+                    <a:bodyPr/>
+                    <a:lstStyle/>
+                    <a:p>
+                      <a:pPr algn="l"/>
+                      <a:r>
+                        <a:rPr sz="1000" b="0">
+                          <a:solidFill>
+                            <a:srgbClr val="1D1B43"/>
+                          </a:solidFill>
+                          <a:latin typeface="Calibri"/>
+                        </a:rPr>
+                        <a:t>10</a:t>
+                      </a:r>
+                    </a:p>
+                  </a:txBody>
+                  <a:tcPr>
+                    <a:solidFill>
+                      <a:srgbClr val="F2F2F2"/>
+                    </a:solidFill>
+                  </a:tcPr>
+                </a:tc>
+                <a:tc>
+                  <a:txBody>
+                    <a:bodyPr/>
+                    <a:lstStyle/>
+                    <a:p>
+                      <a:pPr algn="l"/>
+                      <a:r>
+                        <a:rPr sz="1000" b="0">
+                          <a:solidFill>
+                            <a:srgbClr val="1D1B43"/>
+                          </a:solidFill>
+                          <a:latin typeface="Calibri"/>
+                        </a:rPr>
+                        <a:t>RIO DAS PEDRAS COM D - CAMPINAS / SP</a:t>
+                      </a:r>
+                    </a:p>
+                  </a:txBody>
+                  <a:tcPr>
+                    <a:solidFill>
+                      <a:srgbClr val="F2F2F2"/>
+                    </a:solidFill>
+                  </a:tcPr>
+                </a:tc>
+                <a:tc>
+                  <a:txBody>
+                    <a:bodyPr/>
+                    <a:lstStyle/>
+                    <a:p>
+                      <a:pPr algn="l"/>
+                      <a:r>
+                        <a:rPr sz="1000" b="0">
+                          <a:solidFill>
+                            <a:srgbClr val="1D1B43"/>
+                          </a:solidFill>
+                          <a:latin typeface="Calibri"/>
+                        </a:rPr>
+                        <a:t>1</a:t>
+                      </a:r>
+                    </a:p>
+                  </a:txBody>
+                  <a:tcPr>
+                    <a:solidFill>
+                      <a:srgbClr val="F2F2F2"/>
+                    </a:solidFill>
+                  </a:tcPr>
+                </a:tc>
+                <a:tc>
+                  <a:txBody>
+                    <a:bodyPr/>
+                    <a:lstStyle/>
+                    <a:p>
+                      <a:pPr algn="l"/>
+                      <a:r>
+                        <a:rPr sz="1000" b="0">
+                          <a:solidFill>
+                            <a:srgbClr val="1D1B43"/>
+                          </a:solidFill>
+                          <a:latin typeface="Calibri"/>
+                        </a:rPr>
+                        <a:t>1</a:t>
+                      </a:r>
+                    </a:p>
+                  </a:txBody>
+                  <a:tcPr>
+                    <a:solidFill>
+                      <a:srgbClr val="F2F2F2"/>
+                    </a:solidFill>
+                  </a:tcPr>
+                </a:tc>
+                <a:tc>
+                  <a:txBody>
+                    <a:bodyPr/>
+                    <a:lstStyle/>
+                    <a:p>
+                      <a:pPr algn="l"/>
+                      <a:r>
+                        <a:rPr sz="1000" b="0">
+                          <a:solidFill>
+                            <a:srgbClr val="1D1B43"/>
+                          </a:solidFill>
+                          <a:latin typeface="Calibri"/>
+                        </a:rPr>
+                        <a:t>0</a:t>
+                      </a:r>
+                    </a:p>
+                  </a:txBody>
+                  <a:tcPr>
+                    <a:solidFill>
+                      <a:srgbClr val="F2F2F2"/>
+                    </a:solidFill>
+                  </a:tcPr>
+                </a:tc>
+                <a:tc>
+                  <a:txBody>
+                    <a:bodyPr/>
+                    <a:lstStyle/>
+                    <a:p>
+                      <a:pPr algn="l"/>
+                      <a:r>
+                        <a:rPr sz="1000" b="0">
+                          <a:solidFill>
+                            <a:srgbClr val="1D1B43"/>
+                          </a:solidFill>
+                          <a:latin typeface="Calibri"/>
+                        </a:rPr>
+                        <a:t>100.0%</a:t>
+                      </a:r>
+                    </a:p>
+                  </a:txBody>
+                  <a:tcPr>
+                    <a:solidFill>
+                      <a:srgbClr val="F2F2F2"/>
+                    </a:solidFill>
+                  </a:tcPr>
+                </a:tc>
+                <a:tc>
+                  <a:txBody>
+                    <a:bodyPr/>
+                    <a:lstStyle/>
+                    <a:p>
+                      <a:pPr algn="l"/>
+                      <a:r>
+                        <a:rPr sz="1000" b="0">
+                          <a:solidFill>
+                            <a:srgbClr val="1D1B43"/>
+                          </a:solidFill>
+                          <a:latin typeface="Calibri"/>
+                        </a:rPr>
+                        <a:t>Excelente</a:t>
+                      </a:r>
+                    </a:p>
+                  </a:txBody>
+                  <a:tcPr>
+                    <a:solidFill>
+                      <a:srgbClr val="F2F2F2"/>
+                    </a:solidFill>
+                  </a:tcPr>
+                </a:tc>
+              </a:tr>
+              <a:tr h="292608">
+                <a:tc>
+                  <a:txBody>
+                    <a:bodyPr/>
+                    <a:lstStyle/>
+                    <a:p>
+                      <a:pPr algn="l"/>
+                      <a:r>
+                        <a:rPr sz="1000" b="0">
+                          <a:solidFill>
+                            <a:srgbClr val="1D1B43"/>
+                          </a:solidFill>
+                          <a:latin typeface="Calibri"/>
+                        </a:rPr>
+                        <a:t>11</a:t>
+                      </a:r>
+                    </a:p>
+                  </a:txBody>
+                  <a:tcPr>
+                    <a:solidFill>
+                      <a:srgbClr val="FFFFFF"/>
+                    </a:solidFill>
+                  </a:tcPr>
+                </a:tc>
+                <a:tc>
+                  <a:txBody>
+                    <a:bodyPr/>
+                    <a:lstStyle/>
+                    <a:p>
+                      <a:pPr algn="l"/>
+                      <a:r>
+                        <a:rPr sz="1000" b="0">
+                          <a:solidFill>
+                            <a:srgbClr val="1D1B43"/>
+                          </a:solidFill>
+                          <a:latin typeface="Calibri"/>
+                        </a:rPr>
+                        <a:t>SOL NATAL TRANSPORTE - SAO PAULO / SP</a:t>
+                      </a:r>
+                    </a:p>
+                  </a:txBody>
+                  <a:tcPr>
+                    <a:solidFill>
+                      <a:srgbClr val="FFFFFF"/>
+                    </a:solidFill>
+                  </a:tcPr>
+                </a:tc>
+                <a:tc>
+                  <a:txBody>
+                    <a:bodyPr/>
+                    <a:lstStyle/>
+                    <a:p>
+                      <a:pPr algn="l"/>
+                      <a:r>
+                        <a:rPr sz="1000" b="0">
+                          <a:solidFill>
+                            <a:srgbClr val="1D1B43"/>
+                          </a:solidFill>
+                          <a:latin typeface="Calibri"/>
+                        </a:rPr>
+                        <a:t>1</a:t>
+                      </a:r>
+                    </a:p>
+                  </a:txBody>
+                  <a:tcPr>
+                    <a:solidFill>
+                      <a:srgbClr val="FFFFFF"/>
+                    </a:solidFill>
+                  </a:tcPr>
+                </a:tc>
+                <a:tc>
+                  <a:txBody>
+                    <a:bodyPr/>
+                    <a:lstStyle/>
+                    <a:p>
+                      <a:pPr algn="l"/>
+                      <a:r>
+                        <a:rPr sz="1000" b="0">
+                          <a:solidFill>
+                            <a:srgbClr val="1D1B43"/>
+                          </a:solidFill>
+                          <a:latin typeface="Calibri"/>
+                        </a:rPr>
+                        <a:t>1</a:t>
+                      </a:r>
+                    </a:p>
+                  </a:txBody>
+                  <a:tcPr>
+                    <a:solidFill>
+                      <a:srgbClr val="FFFFFF"/>
+                    </a:solidFill>
+                  </a:tcPr>
+                </a:tc>
+                <a:tc>
+                  <a:txBody>
+                    <a:bodyPr/>
+                    <a:lstStyle/>
+                    <a:p>
+                      <a:pPr algn="l"/>
+                      <a:r>
+                        <a:rPr sz="1000" b="0">
+                          <a:solidFill>
+                            <a:srgbClr val="1D1B43"/>
+                          </a:solidFill>
+                          <a:latin typeface="Calibri"/>
+                        </a:rPr>
+                        <a:t>0</a:t>
+                      </a:r>
+                    </a:p>
+                  </a:txBody>
+                  <a:tcPr>
+                    <a:solidFill>
+                      <a:srgbClr val="FFFFFF"/>
+                    </a:solidFill>
+                  </a:tcPr>
+                </a:tc>
+                <a:tc>
+                  <a:txBody>
+                    <a:bodyPr/>
+                    <a:lstStyle/>
+                    <a:p>
+                      <a:pPr algn="l"/>
+                      <a:r>
+                        <a:rPr sz="1000" b="0">
+                          <a:solidFill>
+                            <a:srgbClr val="1D1B43"/>
+                          </a:solidFill>
+                          <a:latin typeface="Calibri"/>
+                        </a:rPr>
+                        <a:t>100.0%</a:t>
+                      </a:r>
+                    </a:p>
+                  </a:txBody>
+                  <a:tcPr>
+                    <a:solidFill>
+                      <a:srgbClr val="FFFFFF"/>
+                    </a:solidFill>
+                  </a:tcPr>
+                </a:tc>
+                <a:tc>
+                  <a:txBody>
+                    <a:bodyPr/>
+                    <a:lstStyle/>
+                    <a:p>
+                      <a:pPr algn="l"/>
+                      <a:r>
+                        <a:rPr sz="1000" b="0">
+                          <a:solidFill>
+                            <a:srgbClr val="1D1B43"/>
+                          </a:solidFill>
+                          <a:latin typeface="Calibri"/>
+                        </a:rPr>
+                        <a:t>Excelente</a:t>
+                      </a:r>
+                    </a:p>
+                  </a:txBody>
+                  <a:tcPr>
+                    <a:solidFill>
+                      <a:srgbClr val="FFFFFF"/>
+                    </a:solidFill>
+                  </a:tcPr>
+                </a:tc>
+              </a:tr>
+              <a:tr h="292608">
+                <a:tc>
+                  <a:txBody>
+                    <a:bodyPr/>
+                    <a:lstStyle/>
+                    <a:p>
+                      <a:pPr algn="l"/>
+                      <a:r>
+                        <a:rPr sz="1000" b="0">
+                          <a:solidFill>
+                            <a:srgbClr val="1D1B43"/>
+                          </a:solidFill>
+                          <a:latin typeface="Calibri"/>
+                        </a:rPr>
+                        <a:t>12</a:t>
+                      </a:r>
+                    </a:p>
+                  </a:txBody>
+                  <a:tcPr>
+                    <a:solidFill>
+                      <a:srgbClr val="F2F2F2"/>
+                    </a:solidFill>
+                  </a:tcPr>
+                </a:tc>
+                <a:tc>
+                  <a:txBody>
+                    <a:bodyPr/>
+                    <a:lstStyle/>
+                    <a:p>
+                      <a:pPr algn="l"/>
+                      <a:r>
+                        <a:rPr sz="1000" b="0">
+                          <a:solidFill>
+                            <a:srgbClr val="1D1B43"/>
+                          </a:solidFill>
+                          <a:latin typeface="Calibri"/>
+                        </a:rPr>
+                        <a:t>TAU SOFTWARE - SAO PAULO / SP</a:t>
+                      </a:r>
+                    </a:p>
+                  </a:txBody>
+                  <a:tcPr>
+                    <a:solidFill>
+                      <a:srgbClr val="F2F2F2"/>
+                    </a:solidFill>
+                  </a:tcPr>
+                </a:tc>
+                <a:tc>
+                  <a:txBody>
+                    <a:bodyPr/>
+                    <a:lstStyle/>
+                    <a:p>
+                      <a:pPr algn="l"/>
+                      <a:r>
+                        <a:rPr sz="1000" b="0">
+                          <a:solidFill>
+                            <a:srgbClr val="1D1B43"/>
+                          </a:solidFill>
+                          <a:latin typeface="Calibri"/>
+                        </a:rPr>
+                        <a:t>1</a:t>
+                      </a:r>
+                    </a:p>
+                  </a:txBody>
+                  <a:tcPr>
+                    <a:solidFill>
+                      <a:srgbClr val="F2F2F2"/>
+                    </a:solidFill>
+                  </a:tcPr>
+                </a:tc>
+                <a:tc>
+                  <a:txBody>
+                    <a:bodyPr/>
+                    <a:lstStyle/>
+                    <a:p>
+                      <a:pPr algn="l"/>
+                      <a:r>
+                        <a:rPr sz="1000" b="0">
+                          <a:solidFill>
+                            <a:srgbClr val="1D1B43"/>
+                          </a:solidFill>
+                          <a:latin typeface="Calibri"/>
+                        </a:rPr>
+                        <a:t>1</a:t>
+                      </a:r>
+                    </a:p>
+                  </a:txBody>
+                  <a:tcPr>
+                    <a:solidFill>
+                      <a:srgbClr val="F2F2F2"/>
+                    </a:solidFill>
+                  </a:tcPr>
+                </a:tc>
+                <a:tc>
+                  <a:txBody>
+                    <a:bodyPr/>
+                    <a:lstStyle/>
+                    <a:p>
+                      <a:pPr algn="l"/>
+                      <a:r>
+                        <a:rPr sz="1000" b="0">
+                          <a:solidFill>
+                            <a:srgbClr val="1D1B43"/>
+                          </a:solidFill>
+                          <a:latin typeface="Calibri"/>
+                        </a:rPr>
+                        <a:t>0</a:t>
+                      </a:r>
+                    </a:p>
+                  </a:txBody>
+                  <a:tcPr>
+                    <a:solidFill>
+                      <a:srgbClr val="F2F2F2"/>
+                    </a:solidFill>
+                  </a:tcPr>
+                </a:tc>
+                <a:tc>
+                  <a:txBody>
+                    <a:bodyPr/>
+                    <a:lstStyle/>
+                    <a:p>
+                      <a:pPr algn="l"/>
+                      <a:r>
+                        <a:rPr sz="1000" b="0">
+                          <a:solidFill>
+                            <a:srgbClr val="1D1B43"/>
+                          </a:solidFill>
+                          <a:latin typeface="Calibri"/>
+                        </a:rPr>
+                        <a:t>100.0%</a:t>
+                      </a:r>
+                    </a:p>
+                  </a:txBody>
+                  <a:tcPr>
+                    <a:solidFill>
+                      <a:srgbClr val="F2F2F2"/>
+                    </a:solidFill>
+                  </a:tcPr>
+                </a:tc>
+                <a:tc>
+                  <a:txBody>
+                    <a:bodyPr/>
+                    <a:lstStyle/>
+                    <a:p>
+                      <a:pPr algn="l"/>
+                      <a:r>
+                        <a:rPr sz="1000" b="0">
+                          <a:solidFill>
+                            <a:srgbClr val="1D1B43"/>
+                          </a:solidFill>
+                          <a:latin typeface="Calibri"/>
+                        </a:rPr>
+                        <a:t>Excelente</a:t>
+                      </a:r>
+                    </a:p>
+                  </a:txBody>
+                  <a:tcPr>
+                    <a:solidFill>
+                      <a:srgbClr val="F2F2F2"/>
+                    </a:solidFill>
+                  </a:tcPr>
+                </a:tc>
+              </a:tr>
+              <a:tr h="292608">
+                <a:tc>
+                  <a:txBody>
+                    <a:bodyPr/>
+                    <a:lstStyle/>
+                    <a:p>
+                      <a:pPr algn="l"/>
+                      <a:r>
+                        <a:rPr sz="1000" b="0">
+                          <a:solidFill>
+                            <a:srgbClr val="1D1B43"/>
+                          </a:solidFill>
+                          <a:latin typeface="Calibri"/>
+                        </a:rPr>
+                        <a:t>13</a:t>
+                      </a:r>
+                    </a:p>
+                  </a:txBody>
+                  <a:tcPr>
+                    <a:solidFill>
+                      <a:srgbClr val="FFFFFF"/>
+                    </a:solidFill>
+                  </a:tcPr>
+                </a:tc>
+                <a:tc>
+                  <a:txBody>
+                    <a:bodyPr/>
                     <a:lstStyle/>
                     <a:p>
                       <a:pPr algn="l"/>
@@ -6549,13 +7820,176 @@
                   </a:txBody>
                   <a:tcPr>
                     <a:solidFill>
+                      <a:srgbClr val="FFFFFF"/>
+                    </a:solidFill>
+                  </a:tcPr>
+                </a:tc>
+                <a:tc>
+                  <a:txBody>
+                    <a:bodyPr/>
+                    <a:lstStyle/>
+                    <a:p>
+                      <a:pPr algn="l"/>
+                      <a:r>
+                        <a:rPr sz="1000" b="0">
+                          <a:solidFill>
+                            <a:srgbClr val="1D1B43"/>
+                          </a:solidFill>
+                          <a:latin typeface="Calibri"/>
+                        </a:rPr>
+                        <a:t>1</a:t>
+                      </a:r>
+                    </a:p>
+                  </a:txBody>
+                  <a:tcPr>
+                    <a:solidFill>
+                      <a:srgbClr val="FFFFFF"/>
+                    </a:solidFill>
+                  </a:tcPr>
+                </a:tc>
+                <a:tc>
+                  <a:txBody>
+                    <a:bodyPr/>
+                    <a:lstStyle/>
+                    <a:p>
+                      <a:pPr algn="l"/>
+                      <a:r>
+                        <a:rPr sz="1000" b="0">
+                          <a:solidFill>
+                            <a:srgbClr val="1D1B43"/>
+                          </a:solidFill>
+                          <a:latin typeface="Calibri"/>
+                        </a:rPr>
+                        <a:t>1</a:t>
+                      </a:r>
+                    </a:p>
+                  </a:txBody>
+                  <a:tcPr>
+                    <a:solidFill>
+                      <a:srgbClr val="FFFFFF"/>
+                    </a:solidFill>
+                  </a:tcPr>
+                </a:tc>
+                <a:tc>
+                  <a:txBody>
+                    <a:bodyPr/>
+                    <a:lstStyle/>
+                    <a:p>
+                      <a:pPr algn="l"/>
+                      <a:r>
+                        <a:rPr sz="1000" b="0">
+                          <a:solidFill>
+                            <a:srgbClr val="1D1B43"/>
+                          </a:solidFill>
+                          <a:latin typeface="Calibri"/>
+                        </a:rPr>
+                        <a:t>0</a:t>
+                      </a:r>
+                    </a:p>
+                  </a:txBody>
+                  <a:tcPr>
+                    <a:solidFill>
+                      <a:srgbClr val="FFFFFF"/>
+                    </a:solidFill>
+                  </a:tcPr>
+                </a:tc>
+                <a:tc>
+                  <a:txBody>
+                    <a:bodyPr/>
+                    <a:lstStyle/>
+                    <a:p>
+                      <a:pPr algn="l"/>
+                      <a:r>
+                        <a:rPr sz="1000" b="0">
+                          <a:solidFill>
+                            <a:srgbClr val="1D1B43"/>
+                          </a:solidFill>
+                          <a:latin typeface="Calibri"/>
+                        </a:rPr>
+                        <a:t>100.0%</a:t>
+                      </a:r>
+                    </a:p>
+                  </a:txBody>
+                  <a:tcPr>
+                    <a:solidFill>
+                      <a:srgbClr val="FFFFFF"/>
+                    </a:solidFill>
+                  </a:tcPr>
+                </a:tc>
+                <a:tc>
+                  <a:txBody>
+                    <a:bodyPr/>
+                    <a:lstStyle/>
+                    <a:p>
+                      <a:pPr algn="l"/>
+                      <a:r>
+                        <a:rPr sz="1000" b="0">
+                          <a:solidFill>
+                            <a:srgbClr val="1D1B43"/>
+                          </a:solidFill>
+                          <a:latin typeface="Calibri"/>
+                        </a:rPr>
+                        <a:t>Excelente</a:t>
+                      </a:r>
+                    </a:p>
+                  </a:txBody>
+                  <a:tcPr>
+                    <a:solidFill>
+                      <a:srgbClr val="FFFFFF"/>
+                    </a:solidFill>
+                  </a:tcPr>
+                </a:tc>
+              </a:tr>
+              <a:tr h="292608">
+                <a:tc>
+                  <a:txBody>
+                    <a:bodyPr/>
+                    <a:lstStyle/>
+                    <a:p>
+                      <a:pPr algn="l"/>
+                      <a:r>
+                        <a:rPr sz="1000" b="0">
+                          <a:solidFill>
+                            <a:srgbClr val="1D1B43"/>
+                          </a:solidFill>
+                          <a:latin typeface="Calibri"/>
+                        </a:rPr>
+                        <a:t>14</a:t>
+                      </a:r>
+                    </a:p>
+                  </a:txBody>
+                  <a:tcPr>
+                    <a:solidFill>
                       <a:srgbClr val="F2F2F2"/>
                     </a:solidFill>
                   </a:tcPr>
                 </a:tc>
                 <a:tc>
                   <a:txBody>
-                    <a:bodyPr wrap="square"/>
+                    <a:bodyPr/>
+                    <a:lstStyle/>
+                    <a:p>
+                      <a:pPr algn="l"/>
+                      <a:r>
+                        <a:rPr sz="1000" b="0">
+                          <a:solidFill>
+                            <a:srgbClr val="1D1B43"/>
+                          </a:solidFill>
+                          <a:latin typeface="Calibri"/>
+                        </a:rPr>
+                        <a:t>VINHO ATE VOCE LTDA. - CAMPOS DO JORDAO / SP</a:t>
+                      </a:r>
+                    </a:p>
+                  </a:txBody>
+                  <a:tcPr>
+                    <a:solidFill>
+                      <a:srgbClr val="F2F2F2"/>
+                    </a:solidFill>
+                  </a:tcPr>
+                </a:tc>
+                <a:tc>
+                  <a:txBody>
+                    <a:bodyPr/>
                     <a:lstStyle/>
                     <a:p>
                       <a:pPr algn="l"/>
@@ -6578,7 +8012,7 @@
                 </a:tc>
                 <a:tc>
                   <a:txBody>
-                    <a:bodyPr wrap="square"/>
+                    <a:bodyPr/>
                     <a:lstStyle/>
                     <a:p>
                       <a:pPr algn="l"/>
@@ -6601,7 +8035,7 @@
                 </a:tc>
                 <a:tc>
                   <a:txBody>
-                    <a:bodyPr wrap="square"/>
+                    <a:bodyPr/>
                     <a:lstStyle/>
                     <a:p>
                       <a:pPr algn="l"/>
@@ -6624,7 +8058,7 @@
                 </a:tc>
                 <a:tc>
                   <a:txBody>
-                    <a:bodyPr wrap="square"/>
+                    <a:bodyPr/>
                     <a:lstStyle/>
                     <a:p>
                       <a:pPr algn="l"/>
@@ -6647,7 +8081,7 @@
                 </a:tc>
                 <a:tc>
                   <a:txBody>
-                    <a:bodyPr wrap="square"/>
+                    <a:bodyPr/>
                     <a:lstStyle/>
                     <a:p>
                       <a:pPr algn="l"/>
@@ -6665,169 +8099,6 @@
                   <a:tcPr>
                     <a:solidFill>
                       <a:srgbClr val="F2F2F2"/>
-                    </a:solidFill>
-                  </a:tcPr>
-                </a:tc>
-              </a:tr>
-              <a:tr h="384048">
-                <a:tc>
-                  <a:txBody>
-                    <a:bodyPr wrap="square"/>
-                    <a:lstStyle/>
-                    <a:p>
-                      <a:pPr algn="l"/>
-                      <a:r>
-                        <a:rPr sz="1000" b="0">
-                          <a:solidFill>
-                            <a:srgbClr val="1D1B43"/>
-                          </a:solidFill>
-                          <a:latin typeface="Calibri"/>
-                        </a:rPr>
-                        <a:t>3</a:t>
-                      </a:r>
-                    </a:p>
-                  </a:txBody>
-                  <a:tcPr>
-                    <a:solidFill>
-                      <a:srgbClr val="FFFFFF"/>
-                    </a:solidFill>
-                  </a:tcPr>
-                </a:tc>
-                <a:tc>
-                  <a:txBody>
-                    <a:bodyPr wrap="square"/>
-                    <a:lstStyle/>
-                    <a:p>
-                      <a:pPr algn="l"/>
-                      <a:r>
-                        <a:rPr sz="1000" b="0">
-                          <a:solidFill>
-                            <a:srgbClr val="1D1B43"/>
-                          </a:solidFill>
-                          <a:latin typeface="Calibri"/>
-                        </a:rPr>
-                        <a:t>VINHO ATE VOCE LTDA. - CAMPOS DO JORDAO / SP</a:t>
-                      </a:r>
-                    </a:p>
-                  </a:txBody>
-                  <a:tcPr>
-                    <a:solidFill>
-                      <a:srgbClr val="FFFFFF"/>
-                    </a:solidFill>
-                  </a:tcPr>
-                </a:tc>
-                <a:tc>
-                  <a:txBody>
-                    <a:bodyPr wrap="square"/>
-                    <a:lstStyle/>
-                    <a:p>
-                      <a:pPr algn="l"/>
-                      <a:r>
-                        <a:rPr sz="1000" b="0">
-                          <a:solidFill>
-                            <a:srgbClr val="1D1B43"/>
-                          </a:solidFill>
-                          <a:latin typeface="Calibri"/>
-                        </a:rPr>
-                        <a:t>1</a:t>
-                      </a:r>
-                    </a:p>
-                  </a:txBody>
-                  <a:tcPr>
-                    <a:solidFill>
-                      <a:srgbClr val="FFFFFF"/>
-                    </a:solidFill>
-                  </a:tcPr>
-                </a:tc>
-                <a:tc>
-                  <a:txBody>
-                    <a:bodyPr wrap="square"/>
-                    <a:lstStyle/>
-                    <a:p>
-                      <a:pPr algn="l"/>
-                      <a:r>
-                        <a:rPr sz="1000" b="0">
-                          <a:solidFill>
-                            <a:srgbClr val="1D1B43"/>
-                          </a:solidFill>
-                          <a:latin typeface="Calibri"/>
-                        </a:rPr>
-                        <a:t>1</a:t>
-                      </a:r>
-                    </a:p>
-                  </a:txBody>
-                  <a:tcPr>
-                    <a:solidFill>
-                      <a:srgbClr val="FFFFFF"/>
-                    </a:solidFill>
-                  </a:tcPr>
-                </a:tc>
-                <a:tc>
-                  <a:txBody>
-                    <a:bodyPr wrap="square"/>
-                    <a:lstStyle/>
-                    <a:p>
-                      <a:pPr algn="l"/>
-                      <a:r>
-                        <a:rPr sz="1000" b="0">
-                          <a:solidFill>
-                            <a:srgbClr val="1D1B43"/>
-                          </a:solidFill>
-                          <a:latin typeface="Calibri"/>
-                        </a:rPr>
-                        <a:t>0</a:t>
-                      </a:r>
-                    </a:p>
-                  </a:txBody>
-                  <a:tcPr>
-                    <a:solidFill>
-                      <a:srgbClr val="FFFFFF"/>
-                    </a:solidFill>
-                  </a:tcPr>
-                </a:tc>
-                <a:tc>
-                  <a:txBody>
-                    <a:bodyPr wrap="square"/>
-                    <a:lstStyle/>
-                    <a:p>
-                      <a:pPr algn="l"/>
-                      <a:r>
-                        <a:rPr sz="1000" b="0">
-                          <a:solidFill>
-                            <a:srgbClr val="1D1B43"/>
-                          </a:solidFill>
-                          <a:latin typeface="Calibri"/>
-                        </a:rPr>
-                        <a:t>100.0%</a:t>
-                      </a:r>
-                    </a:p>
-                  </a:txBody>
-                  <a:tcPr>
-                    <a:solidFill>
-                      <a:srgbClr val="FFFFFF"/>
-                    </a:solidFill>
-                  </a:tcPr>
-                </a:tc>
-                <a:tc>
-                  <a:txBody>
-                    <a:bodyPr wrap="square"/>
-                    <a:lstStyle/>
-                    <a:p>
-                      <a:pPr algn="l"/>
-                      <a:r>
-                        <a:rPr sz="1000" b="0">
-                          <a:solidFill>
-                            <a:srgbClr val="1D1B43"/>
-                          </a:solidFill>
-                          <a:latin typeface="Calibri"/>
-                        </a:rPr>
-                        <a:t>Excelente</a:t>
-                      </a:r>
-                    </a:p>
-                  </a:txBody>
-                  <a:tcPr>
-                    <a:solidFill>
-                      <a:srgbClr val="FFFFFF"/>
                     </a:solidFill>
                   </a:tcPr>
                 </a:tc>
@@ -6844,7 +8115,7 @@
 </p:sld>
 </file>
 
-<file path=ppt/slides/slide7.xml><?xml version="1.0" encoding="utf-8"?>
+<file path=ppt/slides/slide6.xml><?xml version="1.0" encoding="utf-8"?>
 <p:sld xmlns:a="http://schemas.openxmlformats.org/drawingml/2006/main" xmlns:p="http://schemas.openxmlformats.org/presentationml/2006/main" xmlns:r="http://schemas.openxmlformats.org/officeDocument/2006/relationships">
   <p:cSld>
     <p:bg>
